--- a/slides/4주차_14조_발표.pptx
+++ b/slides/4주차_14조_발표.pptx
@@ -15,9 +15,11 @@
     <p:sldId id="263" r:id="rId9"/>
     <p:sldId id="264" r:id="rId10"/>
     <p:sldId id="265" r:id="rId11"/>
+    <p:sldId id="266" r:id="rId12"/>
+    <p:sldId id="267" r:id="rId13"/>
   </p:sldIdLst>
   <p:notesMasterIdLst>
-    <p:notesMasterId r:id="rId12"/>
+    <p:notesMasterId r:id="rId14"/>
   </p:notesMasterIdLst>
   <p:sldSz cx="12192000" cy="6858000"/>
   <p:notesSz cx="6858000" cy="12192000"/>
@@ -116,18 +118,18 @@
   <p:extLst>
     <p:ext uri="{521415D9-36F7-43E2-AB2F-B90AF26B5E84}">
       <p14:sectionLst xmlns:p14="http://schemas.microsoft.com/office/powerpoint/2010/main">
-        <p14:section name="표지" id="{55ccb67e-526d-3b36-c0e3-a90da9f54e54}">
+        <p14:section name="표지" id="{71f16d08-252a-0b25-3b8d-cb44dd2daa83}">
           <p14:sldIdLst>
             <p14:sldId id="256"/>
           </p14:sldIdLst>
         </p14:section>
-        <p14:section name="1 무엇을 봤는가" id="{74ec656e-c13e-51aa-7d2c-ac107f60cc29}">
+        <p14:section name="1 무엇을 봤는가" id="{188279bd-9e70-b351-1930-23d7dd364830}">
           <p14:sldIdLst>
             <p14:sldId id="257"/>
             <p14:sldId id="258"/>
           </p14:sldIdLst>
         </p14:section>
-        <p14:section name="2 어떻게 했는가" id="{447f544f-0cce-36da-793f-2c1e720e68d1}">
+        <p14:section name="2 어떻게 했는가" id="{70ddb466-29b6-98f7-8a04-b21134799b4b}">
           <p14:sldIdLst>
             <p14:sldId id="259"/>
             <p14:sldId id="260"/>
@@ -136,10 +138,16 @@
             <p14:sldId id="263"/>
           </p14:sldIdLst>
         </p14:section>
-        <p14:section name="3 그래서 무엇인가" id="{cea05d5b-1762-8e80-e12f-a0b0b7374dbe}">
+        <p14:section name="3 그래서 무엇인가" id="{5338c1b0-f9c7-a888-407f-e6dfe760e6c2}">
           <p14:sldIdLst>
             <p14:sldId id="264"/>
             <p14:sldId id="265"/>
+          </p14:sldIdLst>
+        </p14:section>
+        <p14:section name="부록" id="{30bff3dc-1a94-f8b6-0c09-275715931f98}">
+          <p14:sldIdLst>
+            <p14:sldId id="266"/>
+            <p14:sldId id="267"/>
           </p14:sldIdLst>
         </p14:section>
       </p14:sectionLst>
@@ -149,598 +157,6 @@
     </p:ext>
   </p:extLst>
 </p:presentation>
-</file>
-
-<file path=ppt/charts/chart1.xml><?xml version="1.0" encoding="utf-8"?>
-<c:chartSpace xmlns:c="http://schemas.openxmlformats.org/drawingml/2006/chart" xmlns:a="http://schemas.openxmlformats.org/drawingml/2006/main" xmlns:r="http://schemas.openxmlformats.org/officeDocument/2006/relationships">
-  <c:date1904 val="0"/>
-  <c:roundedCorners val="1"/>
-  <c:chart>
-    <c:autoTitleDeleted val="1"/>
-    <c:plotArea>
-      <c:layout/>
-      <c:barChart>
-        <c:barDir val="bar"/>
-        <c:grouping val="clustered"/>
-        <c:varyColors val="0"/>
-        <c:ser>
-          <c:idx val="0"/>
-          <c:order val="0"/>
-          <c:tx>
-            <c:strRef>
-              <c:f>Sheet1!$B$1</c:f>
-              <c:strCache>
-                <c:ptCount val="1"/>
-                <c:pt idx="0">
-                  <c:v>절대 상위5 · 10대 합계(명)</c:v>
-                </c:pt>
-              </c:strCache>
-            </c:strRef>
-          </c:tx>
-          <c:spPr>
-            <a:solidFill>
-              <a:srgbClr val="C9CFD8"/>
-            </a:solidFill>
-            <a:effectLst/>
-          </c:spPr>
-          <c:invertIfNegative val="0"/>
-          <c:dLbls>
-            <c:numFmt formatCode="#,##0" sourceLinked="0"/>
-            <c:txPr>
-              <a:bodyPr/>
-              <a:lstStyle/>
-              <a:p>
-                <a:pPr>
-                  <a:defRPr b="0" i="0" strike="noStrike" sz="1200" u="none">
-                    <a:solidFill>
-                      <a:srgbClr val="1D2430"/>
-                    </a:solidFill>
-                    <a:latin typeface="Malgun Gothic"/>
-                  </a:defRPr>
-                </a:pPr>
-              </a:p>
-            </c:txPr>
-            <c:showLegendKey val="0"/>
-            <c:showVal val="1"/>
-            <c:showCatName val="0"/>
-            <c:showSerName val="0"/>
-            <c:showPercent val="0"/>
-            <c:showBubbleSize val="0"/>
-            <c:showLeaderLines val="0"/>
-          </c:dLbls>
-          <c:dPt>
-            <c:idx val="0"/>
-            <c:invertIfNegative val="0"/>
-            <c:bubble3D val="0"/>
-            <c:spPr>
-              <a:solidFill>
-                <a:srgbClr val="C9CFD8"/>
-              </a:solidFill>
-              <a:effectLst/>
-            </c:spPr>
-          </c:dPt>
-          <c:dPt>
-            <c:idx val="1"/>
-            <c:invertIfNegative val="0"/>
-            <c:bubble3D val="0"/>
-            <c:spPr>
-              <a:solidFill>
-                <a:srgbClr val="C9CFD8"/>
-              </a:solidFill>
-              <a:effectLst/>
-            </c:spPr>
-          </c:dPt>
-          <c:dPt>
-            <c:idx val="2"/>
-            <c:invertIfNegative val="0"/>
-            <c:bubble3D val="0"/>
-            <c:spPr>
-              <a:solidFill>
-                <a:srgbClr val="C9CFD8"/>
-              </a:solidFill>
-              <a:effectLst/>
-            </c:spPr>
-          </c:dPt>
-          <c:dPt>
-            <c:idx val="3"/>
-            <c:invertIfNegative val="0"/>
-            <c:bubble3D val="0"/>
-            <c:spPr>
-              <a:solidFill>
-                <a:srgbClr val="1F8A5B"/>
-              </a:solidFill>
-              <a:effectLst/>
-            </c:spPr>
-          </c:dPt>
-          <c:dPt>
-            <c:idx val="4"/>
-            <c:invertIfNegative val="0"/>
-            <c:bubble3D val="0"/>
-            <c:spPr>
-              <a:solidFill>
-                <a:srgbClr val="1F8A5B"/>
-              </a:solidFill>
-              <a:effectLst/>
-            </c:spPr>
-          </c:dPt>
-          <c:cat>
-            <c:multiLvlStrRef>
-              <c:f>Sheet1!$A$2:$A$6</c:f>
-              <c:multiLvlStrCache>
-                <c:ptCount val="5"/>
-                <c:lvl>
-                  <c:pt idx="0">
-                    <c:v>강남구</c:v>
-                  </c:pt>
-                  <c:pt idx="1">
-                    <c:v>송파구</c:v>
-                  </c:pt>
-                  <c:pt idx="2">
-                    <c:v>관악구</c:v>
-                  </c:pt>
-                  <c:pt idx="3">
-                    <c:v>영등포구</c:v>
-                  </c:pt>
-                  <c:pt idx="4">
-                    <c:v>노원구</c:v>
-                  </c:pt>
-                </c:lvl>
-              </c:multiLvlStrCache>
-            </c:multiLvlStrRef>
-          </c:cat>
-          <c:val>
-            <c:numRef>
-              <c:f>Sheet1!$B$2:$B$6</c:f>
-              <c:numCache>
-                <c:formatCode>General</c:formatCode>
-                <c:ptCount val="5"/>
-                <c:pt idx="0">
-                  <c:v>27203</c:v>
-                </c:pt>
-                <c:pt idx="1">
-                  <c:v>22698</c:v>
-                </c:pt>
-                <c:pt idx="2">
-                  <c:v>21055</c:v>
-                </c:pt>
-                <c:pt idx="3">
-                  <c:v>20223</c:v>
-                </c:pt>
-                <c:pt idx="4">
-                  <c:v>15710</c:v>
-                </c:pt>
-              </c:numCache>
-            </c:numRef>
-          </c:val>
-        </c:ser>
-        <c:dLbls>
-          <c:numFmt formatCode="#,##0" sourceLinked="0"/>
-          <c:txPr>
-            <a:bodyPr/>
-            <a:lstStyle/>
-            <a:p>
-              <a:pPr>
-                <a:defRPr b="0" i="0" strike="noStrike" sz="1200" u="none">
-                  <a:solidFill>
-                    <a:srgbClr val="1D2430"/>
-                  </a:solidFill>
-                  <a:latin typeface="Malgun Gothic"/>
-                </a:defRPr>
-              </a:pPr>
-            </a:p>
-          </c:txPr>
-          <c:showLegendKey val="0"/>
-          <c:showVal val="1"/>
-          <c:showCatName val="0"/>
-          <c:showSerName val="0"/>
-          <c:showPercent val="0"/>
-          <c:showBubbleSize val="0"/>
-          <c:showLeaderLines val="0"/>
-        </c:dLbls>
-        <c:gapWidth val="45"/>
-        <c:overlap val="0"/>
-        <c:axId val="2094734554"/>
-        <c:axId val="2094734552"/>
-        <c:axId val="2094734556"/>
-      </c:barChart>
-      <c:catAx>
-        <c:axId val="2094734554"/>
-        <c:scaling>
-          <c:orientation val="maxMin"/>
-        </c:scaling>
-        <c:delete val="0"/>
-        <c:axPos val="l"/>
-        <c:numFmt formatCode="General" sourceLinked="1"/>
-        <c:majorTickMark val="out"/>
-        <c:minorTickMark val="none"/>
-        <c:tickLblPos val="nextTo"/>
-        <c:spPr>
-          <a:ln w="12700" cap="flat">
-            <a:noFill/>
-            <a:prstDash val="solid"/>
-            <a:round/>
-          </a:ln>
-        </c:spPr>
-        <c:txPr>
-          <a:bodyPr/>
-          <a:lstStyle/>
-          <a:p>
-            <a:pPr>
-              <a:defRPr sz="1300" b="0" i="0" u="none" strike="noStrike">
-                <a:solidFill>
-                  <a:srgbClr val="1D2430"/>
-                </a:solidFill>
-                <a:latin typeface="Malgun Gothic"/>
-              </a:defRPr>
-            </a:pPr>
-            <a:endParaRPr lang="en-US"/>
-          </a:p>
-        </c:txPr>
-        <c:crossAx val="2094734552"/>
-        <c:crosses val="autoZero"/>
-        <c:auto val="1"/>
-        <c:lblAlgn val="ctr"/>
-        <c:noMultiLvlLbl val="1"/>
-      </c:catAx>
-      <c:valAx>
-        <c:axId val="2094734552"/>
-        <c:scaling>
-          <c:orientation val="minMax"/>
-          <c:max val="32000"/>
-          <c:min val="0"/>
-        </c:scaling>
-        <c:delete val="1"/>
-        <c:axPos val="b"/>
-        <c:numFmt formatCode="General" sourceLinked="0"/>
-        <c:majorTickMark val="out"/>
-        <c:minorTickMark val="none"/>
-        <c:tickLblPos val="low"/>
-        <c:spPr>
-          <a:ln w="12700" cap="flat">
-            <a:solidFill>
-              <a:srgbClr val="888888"/>
-            </a:solidFill>
-            <a:prstDash val="solid"/>
-            <a:round/>
-          </a:ln>
-        </c:spPr>
-        <c:txPr>
-          <a:bodyPr/>
-          <a:lstStyle/>
-          <a:p>
-            <a:pPr>
-              <a:defRPr sz="1200" b="0" i="0" u="none" strike="noStrike">
-                <a:solidFill>
-                  <a:srgbClr val="000000"/>
-                </a:solidFill>
-                <a:latin typeface="Arial"/>
-              </a:defRPr>
-            </a:pPr>
-            <a:endParaRPr lang="en-US"/>
-          </a:p>
-        </c:txPr>
-        <c:crossAx val="2094734554"/>
-        <c:crosses val="autoZero"/>
-        <c:crossBetween val="between"/>
-      </c:valAx>
-      <c:spPr>
-        <a:noFill/>
-        <a:ln>
-          <a:noFill/>
-        </a:ln>
-        <a:effectLst/>
-      </c:spPr>
-    </c:plotArea>
-    <c:plotVisOnly val="1"/>
-    <c:dispBlanksAs val="span"/>
-  </c:chart>
-  <c:spPr>
-    <a:noFill/>
-    <a:ln>
-      <a:noFill/>
-    </a:ln>
-    <a:effectLst/>
-  </c:spPr>
-  <c:externalData r:id="rId1">
-    <c:autoUpdate val="0"/>
-  </c:externalData>
-</c:chartSpace>
-</file>
-
-<file path=ppt/charts/chart2.xml><?xml version="1.0" encoding="utf-8"?>
-<c:chartSpace xmlns:c="http://schemas.openxmlformats.org/drawingml/2006/chart" xmlns:a="http://schemas.openxmlformats.org/drawingml/2006/main" xmlns:r="http://schemas.openxmlformats.org/officeDocument/2006/relationships">
-  <c:date1904 val="0"/>
-  <c:roundedCorners val="1"/>
-  <c:chart>
-    <c:autoTitleDeleted val="1"/>
-    <c:plotArea>
-      <c:layout/>
-      <c:barChart>
-        <c:barDir val="bar"/>
-        <c:grouping val="clustered"/>
-        <c:varyColors val="0"/>
-        <c:ser>
-          <c:idx val="0"/>
-          <c:order val="0"/>
-          <c:tx>
-            <c:strRef>
-              <c:f>Sheet1!$B$1</c:f>
-              <c:strCache>
-                <c:ptCount val="1"/>
-                <c:pt idx="0">
-                  <c:v>비중 상위5 · 전 연령 대비 10대(%)</c:v>
-                </c:pt>
-              </c:strCache>
-            </c:strRef>
-          </c:tx>
-          <c:spPr>
-            <a:solidFill>
-              <a:srgbClr val="1F8A5B"/>
-            </a:solidFill>
-            <a:effectLst/>
-          </c:spPr>
-          <c:invertIfNegative val="0"/>
-          <c:dLbls>
-            <c:numFmt formatCode="0.00&quot;%&quot;" sourceLinked="0"/>
-            <c:txPr>
-              <a:bodyPr/>
-              <a:lstStyle/>
-              <a:p>
-                <a:pPr>
-                  <a:defRPr b="0" i="0" strike="noStrike" sz="1200" u="none">
-                    <a:solidFill>
-                      <a:srgbClr val="1D2430"/>
-                    </a:solidFill>
-                    <a:latin typeface="Malgun Gothic"/>
-                  </a:defRPr>
-                </a:pPr>
-              </a:p>
-            </c:txPr>
-            <c:showLegendKey val="0"/>
-            <c:showVal val="1"/>
-            <c:showCatName val="0"/>
-            <c:showSerName val="0"/>
-            <c:showPercent val="0"/>
-            <c:showBubbleSize val="0"/>
-            <c:showLeaderLines val="0"/>
-          </c:dLbls>
-          <c:dPt>
-            <c:idx val="0"/>
-            <c:invertIfNegative val="0"/>
-            <c:bubble3D val="0"/>
-            <c:spPr>
-              <a:solidFill>
-                <a:srgbClr val="1F8A5B"/>
-              </a:solidFill>
-              <a:effectLst/>
-            </c:spPr>
-          </c:dPt>
-          <c:dPt>
-            <c:idx val="1"/>
-            <c:invertIfNegative val="0"/>
-            <c:bubble3D val="0"/>
-            <c:spPr>
-              <a:solidFill>
-                <a:srgbClr val="1F8A5B"/>
-              </a:solidFill>
-              <a:effectLst/>
-            </c:spPr>
-          </c:dPt>
-          <c:dPt>
-            <c:idx val="2"/>
-            <c:invertIfNegative val="0"/>
-            <c:bubble3D val="0"/>
-            <c:spPr>
-              <a:solidFill>
-                <a:srgbClr val="C9CFD8"/>
-              </a:solidFill>
-              <a:effectLst/>
-            </c:spPr>
-          </c:dPt>
-          <c:dPt>
-            <c:idx val="3"/>
-            <c:invertIfNegative val="0"/>
-            <c:bubble3D val="0"/>
-            <c:spPr>
-              <a:solidFill>
-                <a:srgbClr val="C9CFD8"/>
-              </a:solidFill>
-              <a:effectLst/>
-            </c:spPr>
-          </c:dPt>
-          <c:dPt>
-            <c:idx val="4"/>
-            <c:invertIfNegative val="0"/>
-            <c:bubble3D val="0"/>
-            <c:spPr>
-              <a:solidFill>
-                <a:srgbClr val="C9CFD8"/>
-              </a:solidFill>
-              <a:effectLst/>
-            </c:spPr>
-          </c:dPt>
-          <c:cat>
-            <c:multiLvlStrRef>
-              <c:f>Sheet1!$A$2:$A$6</c:f>
-              <c:multiLvlStrCache>
-                <c:ptCount val="5"/>
-                <c:lvl>
-                  <c:pt idx="0">
-                    <c:v>영등포구</c:v>
-                  </c:pt>
-                  <c:pt idx="1">
-                    <c:v>노원구</c:v>
-                  </c:pt>
-                  <c:pt idx="2">
-                    <c:v>중랑구</c:v>
-                  </c:pt>
-                  <c:pt idx="3">
-                    <c:v>서대문구</c:v>
-                  </c:pt>
-                  <c:pt idx="4">
-                    <c:v>금천구</c:v>
-                  </c:pt>
-                </c:lvl>
-              </c:multiLvlStrCache>
-            </c:multiLvlStrRef>
-          </c:cat>
-          <c:val>
-            <c:numRef>
-              <c:f>Sheet1!$B$2:$B$6</c:f>
-              <c:numCache>
-                <c:formatCode>General</c:formatCode>
-                <c:ptCount val="5"/>
-                <c:pt idx="0">
-                  <c:v>18.86</c:v>
-                </c:pt>
-                <c:pt idx="1">
-                  <c:v>18.8</c:v>
-                </c:pt>
-                <c:pt idx="2">
-                  <c:v>18.55</c:v>
-                </c:pt>
-                <c:pt idx="3">
-                  <c:v>18.38</c:v>
-                </c:pt>
-                <c:pt idx="4">
-                  <c:v>17.97</c:v>
-                </c:pt>
-              </c:numCache>
-            </c:numRef>
-          </c:val>
-        </c:ser>
-        <c:dLbls>
-          <c:numFmt formatCode="0.00&quot;%&quot;" sourceLinked="0"/>
-          <c:txPr>
-            <a:bodyPr/>
-            <a:lstStyle/>
-            <a:p>
-              <a:pPr>
-                <a:defRPr b="0" i="0" strike="noStrike" sz="1200" u="none">
-                  <a:solidFill>
-                    <a:srgbClr val="1D2430"/>
-                  </a:solidFill>
-                  <a:latin typeface="Malgun Gothic"/>
-                </a:defRPr>
-              </a:pPr>
-            </a:p>
-          </c:txPr>
-          <c:showLegendKey val="0"/>
-          <c:showVal val="1"/>
-          <c:showCatName val="0"/>
-          <c:showSerName val="0"/>
-          <c:showPercent val="0"/>
-          <c:showBubbleSize val="0"/>
-          <c:showLeaderLines val="0"/>
-        </c:dLbls>
-        <c:gapWidth val="45"/>
-        <c:overlap val="0"/>
-        <c:axId val="2094734554"/>
-        <c:axId val="2094734552"/>
-        <c:axId val="2094734556"/>
-      </c:barChart>
-      <c:catAx>
-        <c:axId val="2094734554"/>
-        <c:scaling>
-          <c:orientation val="maxMin"/>
-        </c:scaling>
-        <c:delete val="0"/>
-        <c:axPos val="l"/>
-        <c:numFmt formatCode="General" sourceLinked="1"/>
-        <c:majorTickMark val="out"/>
-        <c:minorTickMark val="none"/>
-        <c:tickLblPos val="nextTo"/>
-        <c:spPr>
-          <a:ln w="12700" cap="flat">
-            <a:noFill/>
-            <a:prstDash val="solid"/>
-            <a:round/>
-          </a:ln>
-        </c:spPr>
-        <c:txPr>
-          <a:bodyPr/>
-          <a:lstStyle/>
-          <a:p>
-            <a:pPr>
-              <a:defRPr sz="1300" b="0" i="0" u="none" strike="noStrike">
-                <a:solidFill>
-                  <a:srgbClr val="1D2430"/>
-                </a:solidFill>
-                <a:latin typeface="Malgun Gothic"/>
-              </a:defRPr>
-            </a:pPr>
-            <a:endParaRPr lang="en-US"/>
-          </a:p>
-        </c:txPr>
-        <c:crossAx val="2094734552"/>
-        <c:crosses val="autoZero"/>
-        <c:auto val="1"/>
-        <c:lblAlgn val="ctr"/>
-        <c:noMultiLvlLbl val="1"/>
-      </c:catAx>
-      <c:valAx>
-        <c:axId val="2094734552"/>
-        <c:scaling>
-          <c:orientation val="minMax"/>
-          <c:max val="22"/>
-          <c:min val="0"/>
-        </c:scaling>
-        <c:delete val="1"/>
-        <c:axPos val="b"/>
-        <c:numFmt formatCode="General" sourceLinked="0"/>
-        <c:majorTickMark val="out"/>
-        <c:minorTickMark val="none"/>
-        <c:tickLblPos val="low"/>
-        <c:spPr>
-          <a:ln w="12700" cap="flat">
-            <a:solidFill>
-              <a:srgbClr val="888888"/>
-            </a:solidFill>
-            <a:prstDash val="solid"/>
-            <a:round/>
-          </a:ln>
-        </c:spPr>
-        <c:txPr>
-          <a:bodyPr/>
-          <a:lstStyle/>
-          <a:p>
-            <a:pPr>
-              <a:defRPr sz="1200" b="0" i="0" u="none" strike="noStrike">
-                <a:solidFill>
-                  <a:srgbClr val="000000"/>
-                </a:solidFill>
-                <a:latin typeface="Arial"/>
-              </a:defRPr>
-            </a:pPr>
-            <a:endParaRPr lang="en-US"/>
-          </a:p>
-        </c:txPr>
-        <c:crossAx val="2094734554"/>
-        <c:crosses val="autoZero"/>
-        <c:crossBetween val="between"/>
-      </c:valAx>
-      <c:spPr>
-        <a:noFill/>
-        <a:ln>
-          <a:noFill/>
-        </a:ln>
-        <a:effectLst/>
-      </c:spPr>
-    </c:plotArea>
-    <c:plotVisOnly val="1"/>
-    <c:dispBlanksAs val="span"/>
-  </c:chart>
-  <c:spPr>
-    <a:noFill/>
-    <a:ln>
-      <a:noFill/>
-    </a:ln>
-    <a:effectLst/>
-  </c:spPr>
-  <c:externalData r:id="rId1">
-    <c:autoUpdate val="0"/>
-  </c:externalData>
-</c:chartSpace>
 </file>
 
 <file path=ppt/notesMasters/notesMaster1.xml><?xml version="1.0" encoding="utf-8"?>
@@ -1273,6 +689,184 @@
 </p:notes>
 </file>
 
+<file path=ppt/notesSlides/notesSlide11.xml><?xml version="1.0" encoding="utf-8"?>
+<p:notes xmlns:a="http://schemas.openxmlformats.org/drawingml/2006/main" xmlns:r="http://schemas.openxmlformats.org/officeDocument/2006/relationships" xmlns:p="http://schemas.openxmlformats.org/presentationml/2006/main">
+  <p:cSld>
+    <p:spTree>
+      <p:nvGrpSpPr>
+        <p:cNvPr id="1" name=""/>
+        <p:cNvGrpSpPr/>
+        <p:nvPr/>
+      </p:nvGrpSpPr>
+      <p:grpSpPr>
+        <a:xfrm>
+          <a:off x="0" y="0"/>
+          <a:ext cx="0" cy="0"/>
+          <a:chOff x="0" y="0"/>
+          <a:chExt cx="0" cy="0"/>
+        </a:xfrm>
+      </p:grpSpPr>
+      <p:sp>
+        <p:nvSpPr>
+          <p:cNvPr id="2" name="Slide Image Placeholder 1"/>
+          <p:cNvSpPr>
+            <a:spLocks noGrp="1" noRot="1" noChangeAspect="1"/>
+          </p:cNvSpPr>
+          <p:nvPr>
+            <p:ph type="sldImg"/>
+          </p:nvPr>
+        </p:nvSpPr>
+        <p:spPr/>
+      </p:sp>
+      <p:sp>
+        <p:nvSpPr>
+          <p:cNvPr id="3" name="Notes Placeholder 2"/>
+          <p:cNvSpPr>
+            <a:spLocks noGrp="1"/>
+          </p:cNvSpPr>
+          <p:nvPr>
+            <p:ph type="body" idx="1"/>
+          </p:nvPr>
+        </p:nvSpPr>
+        <p:spPr/>
+        <p:txBody>
+          <a:bodyPr/>
+          <a:lstStyle/>
+          <a:p>
+            <a:r>
+              <a:rPr lang="en-US" dirty="0"/>
+              <a:t>[부록 A · 질의응답용]
+'어느 지역이 많은가'를 물으면: 절대는 강남·송파·관악 등 남쪽이 진하고, 비중은 노원·중랑·영등포·서대문이 진합니다. 두 지도에서 모두 진한 곳(굵은 테두리)이 노원구와 영등포구입니다.</a:t>
+            </a:r>
+            <a:endParaRPr lang="en-US" dirty="0"/>
+          </a:p>
+        </p:txBody>
+      </p:sp>
+      <p:sp>
+        <p:nvSpPr>
+          <p:cNvPr id="4" name="Slide Number Placeholder 3"/>
+          <p:cNvSpPr>
+            <a:spLocks noGrp="1"/>
+          </p:cNvSpPr>
+          <p:nvPr>
+            <p:ph type="sldNum" sz="quarter" idx="10"/>
+          </p:nvPr>
+        </p:nvSpPr>
+        <p:spPr/>
+        <p:txBody>
+          <a:bodyPr/>
+          <a:lstStyle/>
+          <a:p>
+            <a:fld id="{F7021451-1387-4CA6-816F-3879F97B5CBC}" type="slidenum">
+              <a:rPr lang="en-US"/>
+              <a:t>11</a:t>
+            </a:fld>
+            <a:endParaRPr lang="en-US"/>
+          </a:p>
+        </p:txBody>
+      </p:sp>
+    </p:spTree>
+    <p:extLst>
+      <p:ext uri="{BB962C8B-B14F-4D97-AF65-F5344CB8AC3E}">
+        <p14:creationId xmlns:p14="http://schemas.microsoft.com/office/powerpoint/2010/main" val="1024086991"/>
+      </p:ext>
+    </p:extLst>
+  </p:cSld>
+  <p:clrMapOvr>
+    <a:masterClrMapping/>
+  </p:clrMapOvr>
+</p:notes>
+</file>
+
+<file path=ppt/notesSlides/notesSlide12.xml><?xml version="1.0" encoding="utf-8"?>
+<p:notes xmlns:a="http://schemas.openxmlformats.org/drawingml/2006/main" xmlns:r="http://schemas.openxmlformats.org/officeDocument/2006/relationships" xmlns:p="http://schemas.openxmlformats.org/presentationml/2006/main">
+  <p:cSld>
+    <p:spTree>
+      <p:nvGrpSpPr>
+        <p:cNvPr id="1" name=""/>
+        <p:cNvGrpSpPr/>
+        <p:nvPr/>
+      </p:nvGrpSpPr>
+      <p:grpSpPr>
+        <a:xfrm>
+          <a:off x="0" y="0"/>
+          <a:ext cx="0" cy="0"/>
+          <a:chOff x="0" y="0"/>
+          <a:chExt cx="0" cy="0"/>
+        </a:xfrm>
+      </p:grpSpPr>
+      <p:sp>
+        <p:nvSpPr>
+          <p:cNvPr id="2" name="Slide Image Placeholder 1"/>
+          <p:cNvSpPr>
+            <a:spLocks noGrp="1" noRot="1" noChangeAspect="1"/>
+          </p:cNvSpPr>
+          <p:nvPr>
+            <p:ph type="sldImg"/>
+          </p:nvPr>
+        </p:nvSpPr>
+        <p:spPr/>
+      </p:sp>
+      <p:sp>
+        <p:nvSpPr>
+          <p:cNvPr id="3" name="Notes Placeholder 2"/>
+          <p:cNvSpPr>
+            <a:spLocks noGrp="1"/>
+          </p:cNvSpPr>
+          <p:nvPr>
+            <p:ph type="body" idx="1"/>
+          </p:nvPr>
+        </p:nvSpPr>
+        <p:spPr/>
+        <p:txBody>
+          <a:bodyPr/>
+          <a:lstStyle/>
+          <a:p>
+            <a:r>
+              <a:rPr lang="en-US" dirty="0"/>
+              <a:t>[부록 B · 질의응답용]
+'정제 후 분포가 왜 내려갔냐'를 물으면: 노트북 그림은 로그축이 음수를 못 그려 정제 전 패널의 축이 달라진 착시입니다. 같은 축으로 그리면 중앙값은 3,043 → 3,050으로 거의 같고, 정제가 정상값을 건드리지 않았다는 근거입니다. 음수 25건은 0건, 동대문 고값은 범위 밖이라 19 → 18건(중복 1건 제거)으로 남았습니다.</a:t>
+            </a:r>
+            <a:endParaRPr lang="en-US" dirty="0"/>
+          </a:p>
+        </p:txBody>
+      </p:sp>
+      <p:sp>
+        <p:nvSpPr>
+          <p:cNvPr id="4" name="Slide Number Placeholder 3"/>
+          <p:cNvSpPr>
+            <a:spLocks noGrp="1"/>
+          </p:cNvSpPr>
+          <p:nvPr>
+            <p:ph type="sldNum" sz="quarter" idx="10"/>
+          </p:nvPr>
+        </p:nvSpPr>
+        <p:spPr/>
+        <p:txBody>
+          <a:bodyPr/>
+          <a:lstStyle/>
+          <a:p>
+            <a:fld id="{F7021451-1387-4CA6-816F-3879F97B5CBC}" type="slidenum">
+              <a:rPr lang="en-US"/>
+              <a:t>12</a:t>
+            </a:fld>
+            <a:endParaRPr lang="en-US"/>
+          </a:p>
+        </p:txBody>
+      </p:sp>
+    </p:spTree>
+    <p:extLst>
+      <p:ext uri="{BB962C8B-B14F-4D97-AF65-F5344CB8AC3E}">
+        <p14:creationId xmlns:p14="http://schemas.microsoft.com/office/powerpoint/2010/main" val="1024086991"/>
+      </p:ext>
+    </p:extLst>
+  </p:cSld>
+  <p:clrMapOvr>
+    <a:masterClrMapping/>
+  </p:clrMapOvr>
+</p:notes>
+</file>
+
 <file path=ppt/notesSlides/notesSlide2.xml><?xml version="1.0" encoding="utf-8"?>
 <p:notes xmlns:a="http://schemas.openxmlformats.org/drawingml/2006/main" xmlns:r="http://schemas.openxmlformats.org/officeDocument/2006/relationships" xmlns:p="http://schemas.openxmlformats.org/presentationml/2006/main">
   <p:cSld>
@@ -1963,8 +1557,8 @@
             <a:r>
               <a:rPr lang="en-US" dirty="0"/>
               <a:t>[발표자: 신효주 · 목표 0:55]
-정제 후 결과입니다. [왼쪽 차트] 절대 상위5는 강남, 송파, 관악, 영등포, 노원. [오른쪽 차트] 비중 상위5는 영등포, 노원, 중랑, 서대문, 금천입니다. 두 목록에 모두 든 구는 노원구와 영등포구, 둘뿐입니다.
-[아래 카드] 가설과 비교하면, 강남 절대 1위와 노원 비중 2위는 맞았습니다. 강남은 사람은 가장 많지만 비중은 19위로, 번화한 학원가일수록 비중이 묽어진다는 예측도 맞았습니다. 하지만 관악 절대 3위, 영등포 비중 1위는 학원가 목록에 없던 결과입니다.
+정제 후 결과입니다. 가로가 절대, 세로가 비중입니다. [파란 점] 절대 상위5는 강남, 송파, 관악, 영등포, 노원. [주황 점] 비중 상위5는 영등포, 노원, 중랑, 서대문, 금천입니다. [오른쪽 위 초록 점] 두 목록에 모두 든 구는 노원구와 영등포구, 둘뿐입니다.
+[오른쪽 카드] 가설과 비교하면, 강남 절대 1위와 노원 비중 2위는 맞았습니다. [오른쪽 아래] 강남은 사람은 가장 많지만 비중은 19위로, 번화한 학원가일수록 비중이 묽어진다는 예측도 맞았습니다. 하지만 관악 절대 3위, 영등포 비중 1위는 학원가 목록에 없던 결과입니다.
 그래서 미리 정한 규칙대로 가설을 부분 기각하고, 학원가와 상업·교통 같은 비학업 요인을 함께 보는 설명으로 바꿨습니다. 다만 왜 관악과 영등포에 몰렸는지는 이 데이터만으로 증명할 수 없어서, 한계로 남겼습니다.</a:t>
             </a:r>
             <a:endParaRPr lang="en-US" dirty="0"/>
@@ -3385,6 +2979,38 @@
 </p:sldLayout>
 </file>
 
+<file path=ppt/slideLayouts/slideLayout7.xml><?xml version="1.0" encoding="utf-8"?>
+<p:sldLayout xmlns:a="http://schemas.openxmlformats.org/drawingml/2006/main" xmlns:r="http://schemas.openxmlformats.org/officeDocument/2006/relationships" xmlns:p="http://schemas.openxmlformats.org/presentationml/2006/main" preserve="1">
+  <p:cSld name="APPX">
+    <p:bg>
+      <p:bgPr>
+        <a:solidFill>
+          <a:srgbClr val="FBFBFA"/>
+        </a:solidFill>
+      </p:bgPr>
+    </p:bg>
+    <p:spTree>
+      <p:nvGrpSpPr>
+        <p:cNvPr id="1" name=""/>
+        <p:cNvGrpSpPr/>
+        <p:nvPr/>
+      </p:nvGrpSpPr>
+      <p:grpSpPr>
+        <a:xfrm>
+          <a:off x="0" y="0"/>
+          <a:ext cx="0" cy="0"/>
+          <a:chOff x="0" y="0"/>
+          <a:chExt cx="0" cy="0"/>
+        </a:xfrm>
+      </p:grpSpPr>
+    </p:spTree>
+  </p:cSld>
+  <p:clrMapOvr>
+    <a:masterClrMapping/>
+  </p:clrMapOvr>
+</p:sldLayout>
+</file>
+
 <file path=ppt/slideMasters/slideMaster1.xml><?xml version="1.0" encoding="utf-8"?>
 <p:sldMaster xmlns:a="http://schemas.openxmlformats.org/drawingml/2006/main" xmlns:r="http://schemas.openxmlformats.org/officeDocument/2006/relationships" xmlns:p="http://schemas.openxmlformats.org/presentationml/2006/main">
   <p:cSld>
@@ -3460,6 +3086,7 @@
     <p:sldLayoutId id="2147483652" r:id="rId4"/>
     <p:sldLayoutId id="2147483653" r:id="rId5"/>
     <p:sldLayoutId id="2147483654" r:id="rId6"/>
+    <p:sldLayoutId id="2147483655" r:id="rId7"/>
   </p:sldLayoutIdLst>
   <p:hf sldNum="0" hdr="0" ftr="0" dt="0"/>
   <p:txStyles>
@@ -5490,6 +5117,400 @@
 </p:sld>
 </file>
 
+<file path=ppt/slides/slide11.xml><?xml version="1.0" encoding="utf-8"?>
+<p:sld xmlns:a="http://schemas.openxmlformats.org/drawingml/2006/main" xmlns:r="http://schemas.openxmlformats.org/officeDocument/2006/relationships" xmlns:p="http://schemas.openxmlformats.org/presentationml/2006/main">
+  <p:cSld name="Slide 11">
+    <p:spTree>
+      <p:nvGrpSpPr>
+        <p:cNvPr id="1" name=""/>
+        <p:cNvGrpSpPr/>
+        <p:nvPr/>
+      </p:nvGrpSpPr>
+      <p:grpSpPr>
+        <a:xfrm>
+          <a:off x="0" y="0"/>
+          <a:ext cx="0" cy="0"/>
+          <a:chOff x="0" y="0"/>
+          <a:chExt cx="0" cy="0"/>
+        </a:xfrm>
+      </p:grpSpPr>
+      <p:sp>
+        <p:nvSpPr>
+          <p:cNvPr id="2" name="Text 0"/>
+          <p:cNvSpPr txBox="1"/>
+          <p:nvPr/>
+        </p:nvSpPr>
+        <p:spPr>
+          <a:xfrm>
+            <a:off x="548640" y="274320"/>
+            <a:ext cx="2377440" cy="274320"/>
+          </a:xfrm>
+          <a:prstGeom prst="roundRect">
+            <a:avLst>
+              <a:gd name="adj" fmla="val 50000"/>
+            </a:avLst>
+          </a:prstGeom>
+          <a:solidFill>
+            <a:srgbClr val="F3F5F8"/>
+          </a:solidFill>
+          <a:ln/>
+        </p:spPr>
+        <p:txBody>
+          <a:bodyPr wrap="square" lIns="0" tIns="0" rIns="0" bIns="0" rtlCol="0" anchor="ctr"/>
+          <a:lstStyle/>
+          <a:p>
+            <a:pPr eaLnBrk="0" algn="ctr" indent="0" marL="0">
+              <a:buNone/>
+            </a:pPr>
+            <a:r>
+              <a:rPr lang="ko-KR" sz="1200" b="1" dirty="0">
+                <a:solidFill>
+                  <a:srgbClr val="5B6472"/>
+                </a:solidFill>
+                <a:latin typeface="Malgun Gothic" pitchFamily="34" charset="0"/>
+                <a:ea typeface="Malgun Gothic" pitchFamily="34" charset="-122"/>
+                <a:cs typeface="Malgun Gothic" pitchFamily="34" charset="-120"/>
+              </a:rPr>
+              <a:t>부록 A · 지도</a:t>
+            </a:r>
+            <a:endParaRPr lang="ko-KR" sz="1200" dirty="0"/>
+          </a:p>
+        </p:txBody>
+      </p:sp>
+      <p:sp>
+        <p:nvSpPr>
+          <p:cNvPr id="3" name="live-link"/>
+          <p:cNvSpPr txBox="1"/>
+          <p:nvPr/>
+        </p:nvSpPr>
+        <p:spPr>
+          <a:xfrm>
+            <a:off x="3063240" y="246888"/>
+            <a:ext cx="2514600" cy="329184"/>
+          </a:xfrm>
+          <a:prstGeom prst="roundRect">
+            <a:avLst>
+              <a:gd name="adj" fmla="val 50000"/>
+            </a:avLst>
+          </a:prstGeom>
+          <a:solidFill>
+            <a:srgbClr val="DDF3E8"/>
+          </a:solidFill>
+          <a:ln w="12700">
+            <a:solidFill>
+              <a:srgbClr val="1F8A5B"/>
+            </a:solidFill>
+          </a:ln>
+        </p:spPr>
+        <p:txBody>
+          <a:bodyPr wrap="square" lIns="0" tIns="0" rIns="0" bIns="0" rtlCol="0" anchor="ctr"/>
+          <a:lstStyle/>
+          <a:p>
+            <a:pPr eaLnBrk="0" algn="ctr" indent="0" marL="0">
+              <a:buNone/>
+            </a:pPr>
+            <a:r>
+              <a:rPr lang="ko-KR" sz="1200" b="1" u="sng" dirty="0">
+                <a:solidFill>
+                  <a:srgbClr val="1F8A5B"/>
+                </a:solidFill>
+                <a:latin typeface="Malgun Gothic" pitchFamily="34" charset="0"/>
+                <a:ea typeface="Malgun Gothic" pitchFamily="34" charset="-122"/>
+                <a:cs typeface="Malgun Gothic" pitchFamily="34" charset="-120"/>
+                <a:hlinkClick r:id="rId1" invalidUrl="" action="" tgtFrame="" tooltip="마우스 오버·클릭·분모 보정 전환이 되는 차트 열기" history="1" highlightClick="0" endSnd="0">
+                  <a:extLst>
+                    <a:ext uri="{A12FA001-AC4F-418D-AE19-62706E023703}">
+                      <ahyp:hlinkClr xmlns:ahyp="http://schemas.microsoft.com/office/drawing/2018/hyperlinkcolor" val="tx"/>
+                    </a:ext>
+                  </a:extLst>
+                </a:hlinkClick>
+              </a:rPr>
+              <a:t>▶ 직접 해보기 · 상호작용 차트</a:t>
+            </a:r>
+            <a:endParaRPr lang="ko-KR" sz="1200" dirty="0"/>
+          </a:p>
+        </p:txBody>
+      </p:sp>
+      <p:pic>
+        <p:nvPicPr>
+          <p:cNvPr id="4" name="Image 0" descr="서울 25개 자치구 절대·비중 지도">    </p:cNvPr>
+          <p:cNvPicPr>
+            <a:picLocks noChangeAspect="1"/>
+          </p:cNvPicPr>
+          <p:nvPr/>
+        </p:nvPicPr>
+        <p:blipFill>
+          <a:blip r:embed="rId2"/>
+          <a:stretch>
+            <a:fillRect/>
+          </a:stretch>
+        </p:blipFill>
+        <p:spPr>
+          <a:xfrm>
+            <a:off x="792328" y="685800"/>
+            <a:ext cx="10607040" cy="5966460"/>
+          </a:xfrm>
+          <a:prstGeom prst="rect">
+            <a:avLst/>
+          </a:prstGeom>
+        </p:spPr>
+      </p:pic>
+      <p:pic>
+        <p:nvPicPr>
+          <p:cNvPr id="5" name="Image 1" descr="상호작용 차트 QR 코드">    </p:cNvPr>
+          <p:cNvPicPr>
+            <a:picLocks noChangeAspect="1"/>
+          </p:cNvPicPr>
+          <p:nvPr/>
+        </p:nvPicPr>
+        <p:blipFill>
+          <a:blip r:embed="rId3"/>
+          <a:stretch>
+            <a:fillRect/>
+          </a:stretch>
+        </p:blipFill>
+        <p:spPr>
+          <a:xfrm>
+            <a:off x="10515600" y="868680"/>
+            <a:ext cx="868680" cy="868680"/>
+          </a:xfrm>
+          <a:prstGeom prst="rect">
+            <a:avLst/>
+          </a:prstGeom>
+        </p:spPr>
+      </p:pic>
+      <p:sp>
+        <p:nvSpPr>
+          <p:cNvPr id="6" name="Text 2"/>
+          <p:cNvSpPr txBox="1"/>
+          <p:nvPr/>
+        </p:nvSpPr>
+        <p:spPr>
+          <a:xfrm>
+            <a:off x="6949440" y="1143000"/>
+            <a:ext cx="3474720" cy="274320"/>
+          </a:xfrm>
+          <a:prstGeom prst="rect">
+            <a:avLst/>
+          </a:prstGeom>
+          <a:noFill/>
+          <a:ln/>
+        </p:spPr>
+        <p:txBody>
+          <a:bodyPr wrap="square" lIns="0" tIns="0" rIns="0" bIns="0" rtlCol="0" anchor="ctr"/>
+          <a:lstStyle/>
+          <a:p>
+            <a:pPr eaLnBrk="0" algn="r" indent="0" marL="0">
+              <a:buNone/>
+            </a:pPr>
+            <a:r>
+              <a:rPr lang="ko-KR" sz="1000" dirty="0">
+                <a:solidFill>
+                  <a:srgbClr val="5B6472"/>
+                </a:solidFill>
+                <a:latin typeface="Malgun Gothic" pitchFamily="34" charset="0"/>
+                <a:ea typeface="Malgun Gothic" pitchFamily="34" charset="-122"/>
+                <a:cs typeface="Malgun Gothic" pitchFamily="34" charset="-120"/>
+              </a:rPr>
+              <a:t>202103116-stack.github.io/4-_14-_-D/slides/charts</a:t>
+            </a:r>
+            <a:endParaRPr lang="ko-KR" sz="1000" dirty="0"/>
+          </a:p>
+        </p:txBody>
+      </p:sp>
+      <p:sp>
+        <p:nvSpPr>
+          <p:cNvPr id="7" name="Text 3"/>
+          <p:cNvSpPr txBox="1"/>
+          <p:nvPr/>
+        </p:nvSpPr>
+        <p:spPr>
+          <a:xfrm>
+            <a:off x="6949440" y="1389888"/>
+            <a:ext cx="3474720" cy="256032"/>
+          </a:xfrm>
+          <a:prstGeom prst="rect">
+            <a:avLst/>
+          </a:prstGeom>
+          <a:noFill/>
+          <a:ln/>
+        </p:spPr>
+        <p:txBody>
+          <a:bodyPr wrap="square" lIns="0" tIns="0" rIns="0" bIns="0" rtlCol="0" anchor="ctr"/>
+          <a:lstStyle/>
+          <a:p>
+            <a:pPr eaLnBrk="0" algn="r" indent="0" marL="0">
+              <a:buNone/>
+            </a:pPr>
+            <a:r>
+              <a:rPr lang="ko-KR" sz="1000" dirty="0">
+                <a:solidFill>
+                  <a:srgbClr val="6B7280"/>
+                </a:solidFill>
+                <a:latin typeface="Malgun Gothic" pitchFamily="34" charset="0"/>
+                <a:ea typeface="Malgun Gothic" pitchFamily="34" charset="-122"/>
+                <a:cs typeface="Malgun Gothic" pitchFamily="34" charset="-120"/>
+              </a:rPr>
+              <a:t>휴대폰으로 찍으면 바로 열립니다</a:t>
+            </a:r>
+            <a:endParaRPr lang="ko-KR" sz="1000" dirty="0"/>
+          </a:p>
+        </p:txBody>
+      </p:sp>
+    </p:spTree>
+  </p:cSld>
+  <p:clrMapOvr>
+    <a:masterClrMapping/>
+  </p:clrMapOvr>
+</p:sld>
+</file>
+
+<file path=ppt/slides/slide12.xml><?xml version="1.0" encoding="utf-8"?>
+<p:sld xmlns:a="http://schemas.openxmlformats.org/drawingml/2006/main" xmlns:r="http://schemas.openxmlformats.org/officeDocument/2006/relationships" xmlns:p="http://schemas.openxmlformats.org/presentationml/2006/main">
+  <p:cSld name="Slide 12">
+    <p:spTree>
+      <p:nvGrpSpPr>
+        <p:cNvPr id="1" name=""/>
+        <p:cNvGrpSpPr/>
+        <p:nvPr/>
+      </p:nvGrpSpPr>
+      <p:grpSpPr>
+        <a:xfrm>
+          <a:off x="0" y="0"/>
+          <a:ext cx="0" cy="0"/>
+          <a:chOff x="0" y="0"/>
+          <a:chExt cx="0" cy="0"/>
+        </a:xfrm>
+      </p:grpSpPr>
+      <p:sp>
+        <p:nvSpPr>
+          <p:cNvPr id="2" name="Text 0"/>
+          <p:cNvSpPr txBox="1"/>
+          <p:nvPr/>
+        </p:nvSpPr>
+        <p:spPr>
+          <a:xfrm>
+            <a:off x="548640" y="274320"/>
+            <a:ext cx="2377440" cy="274320"/>
+          </a:xfrm>
+          <a:prstGeom prst="roundRect">
+            <a:avLst>
+              <a:gd name="adj" fmla="val 50000"/>
+            </a:avLst>
+          </a:prstGeom>
+          <a:solidFill>
+            <a:srgbClr val="F3F5F8"/>
+          </a:solidFill>
+          <a:ln/>
+        </p:spPr>
+        <p:txBody>
+          <a:bodyPr wrap="square" lIns="0" tIns="0" rIns="0" bIns="0" rtlCol="0" anchor="ctr"/>
+          <a:lstStyle/>
+          <a:p>
+            <a:pPr eaLnBrk="0" algn="ctr" indent="0" marL="0">
+              <a:buNone/>
+            </a:pPr>
+            <a:r>
+              <a:rPr lang="ko-KR" sz="1200" b="1" dirty="0">
+                <a:solidFill>
+                  <a:srgbClr val="5B6472"/>
+                </a:solidFill>
+                <a:latin typeface="Malgun Gothic" pitchFamily="34" charset="0"/>
+                <a:ea typeface="Malgun Gothic" pitchFamily="34" charset="-122"/>
+                <a:cs typeface="Malgun Gothic" pitchFamily="34" charset="-120"/>
+              </a:rPr>
+              <a:t>부록 B · 정제 전후 분포</a:t>
+            </a:r>
+            <a:endParaRPr lang="ko-KR" sz="1200" dirty="0"/>
+          </a:p>
+        </p:txBody>
+      </p:sp>
+      <p:sp>
+        <p:nvSpPr>
+          <p:cNvPr id="3" name="live-link"/>
+          <p:cNvSpPr txBox="1"/>
+          <p:nvPr/>
+        </p:nvSpPr>
+        <p:spPr>
+          <a:xfrm>
+            <a:off x="3063240" y="246888"/>
+            <a:ext cx="2514600" cy="329184"/>
+          </a:xfrm>
+          <a:prstGeom prst="roundRect">
+            <a:avLst>
+              <a:gd name="adj" fmla="val 50000"/>
+            </a:avLst>
+          </a:prstGeom>
+          <a:solidFill>
+            <a:srgbClr val="DDF3E8"/>
+          </a:solidFill>
+          <a:ln w="12700">
+            <a:solidFill>
+              <a:srgbClr val="1F8A5B"/>
+            </a:solidFill>
+          </a:ln>
+        </p:spPr>
+        <p:txBody>
+          <a:bodyPr wrap="square" lIns="0" tIns="0" rIns="0" bIns="0" rtlCol="0" anchor="ctr"/>
+          <a:lstStyle/>
+          <a:p>
+            <a:pPr eaLnBrk="0" algn="ctr" indent="0" marL="0">
+              <a:buNone/>
+            </a:pPr>
+            <a:r>
+              <a:rPr lang="ko-KR" sz="1200" b="1" u="sng" dirty="0">
+                <a:solidFill>
+                  <a:srgbClr val="1F8A5B"/>
+                </a:solidFill>
+                <a:latin typeface="Malgun Gothic" pitchFamily="34" charset="0"/>
+                <a:ea typeface="Malgun Gothic" pitchFamily="34" charset="-122"/>
+                <a:cs typeface="Malgun Gothic" pitchFamily="34" charset="-120"/>
+                <a:hlinkClick r:id="rId1" invalidUrl="" action="" tgtFrame="" tooltip="마우스 오버·클릭·분모 보정 전환이 되는 차트 열기" history="1" highlightClick="0" endSnd="0">
+                  <a:extLst>
+                    <a:ext uri="{A12FA001-AC4F-418D-AE19-62706E023703}">
+                      <ahyp:hlinkClr xmlns:ahyp="http://schemas.microsoft.com/office/drawing/2018/hyperlinkcolor" val="tx"/>
+                    </a:ext>
+                  </a:extLst>
+                </a:hlinkClick>
+              </a:rPr>
+              <a:t>▶ 직접 해보기 · 상호작용 차트</a:t>
+            </a:r>
+            <a:endParaRPr lang="ko-KR" sz="1200" dirty="0"/>
+          </a:p>
+        </p:txBody>
+      </p:sp>
+      <p:pic>
+        <p:nvPicPr>
+          <p:cNvPr id="4" name="Image 0" descr="정제 전후 생활인구수 분포 상자그림(로그 축)">    </p:cNvPr>
+          <p:cNvPicPr>
+            <a:picLocks noChangeAspect="1"/>
+          </p:cNvPicPr>
+          <p:nvPr/>
+        </p:nvPicPr>
+        <p:blipFill>
+          <a:blip r:embed="rId2"/>
+          <a:stretch>
+            <a:fillRect/>
+          </a:stretch>
+        </p:blipFill>
+        <p:spPr>
+          <a:xfrm>
+            <a:off x="792328" y="685800"/>
+            <a:ext cx="10607040" cy="5966460"/>
+          </a:xfrm>
+          <a:prstGeom prst="rect">
+            <a:avLst/>
+          </a:prstGeom>
+        </p:spPr>
+      </p:pic>
+    </p:spTree>
+  </p:cSld>
+  <p:clrMapOvr>
+    <a:masterClrMapping/>
+  </p:clrMapOvr>
+</p:sld>
+</file>
+
 <file path=ppt/slides/slide2.xml><?xml version="1.0" encoding="utf-8"?>
 <p:sld xmlns:a="http://schemas.openxmlformats.org/drawingml/2006/main" xmlns:r="http://schemas.openxmlformats.org/officeDocument/2006/relationships" xmlns:p="http://schemas.openxmlformats.org/presentationml/2006/main">
   <p:cSld name="Slide 2">
@@ -13125,1638 +13146,14 @@
       </p:sp>
       <p:sp>
         <p:nvSpPr>
-          <p:cNvPr id="3" name="slope-bg"/>
-          <p:cNvSpPr/>
-          <p:nvPr/>
-        </p:nvSpPr>
-        <p:spPr>
-          <a:xfrm>
-            <a:off x="548640" y="1691640"/>
-            <a:ext cx="5943600" cy="4572000"/>
-          </a:xfrm>
-          <a:prstGeom prst="roundRect">
-            <a:avLst>
-              <a:gd name="adj" fmla="val 2400"/>
-            </a:avLst>
-          </a:prstGeom>
-          <a:solidFill>
-            <a:srgbClr val="F3F5F8"/>
-          </a:solidFill>
-          <a:ln/>
-        </p:spPr>
-      </p:sp>
-      <p:sp>
-        <p:nvSpPr>
-          <p:cNvPr id="4" name="Text 2"/>
-          <p:cNvSpPr txBox="1"/>
-          <p:nvPr/>
-        </p:nvSpPr>
-        <p:spPr>
-          <a:xfrm>
-            <a:off x="777240" y="1828800"/>
-            <a:ext cx="1828800" cy="292608"/>
-          </a:xfrm>
-          <a:prstGeom prst="rect">
-            <a:avLst/>
-          </a:prstGeom>
-          <a:noFill/>
-          <a:ln/>
-        </p:spPr>
-        <p:txBody>
-          <a:bodyPr wrap="square" lIns="0" tIns="0" rIns="0" bIns="0" rtlCol="0" anchor="t"/>
-          <a:lstStyle/>
-          <a:p>
-            <a:pPr eaLnBrk="0" algn="r" indent="0" marL="0">
-              <a:buNone/>
-            </a:pPr>
-            <a:r>
-              <a:rPr lang="ko-KR" sz="1300" b="1" dirty="0">
-                <a:solidFill>
-                  <a:srgbClr val="6B7280"/>
-                </a:solidFill>
-                <a:latin typeface="Malgun Gothic" pitchFamily="34" charset="0"/>
-                <a:ea typeface="Malgun Gothic" pitchFamily="34" charset="-122"/>
-                <a:cs typeface="Malgun Gothic" pitchFamily="34" charset="-120"/>
-              </a:rPr>
-              <a:t>보정 안 함</a:t>
-            </a:r>
-            <a:endParaRPr lang="ko-KR" sz="1300" dirty="0"/>
-          </a:p>
-        </p:txBody>
-      </p:sp>
-      <p:sp>
-        <p:nvSpPr>
-          <p:cNvPr id="5" name="Text 3"/>
-          <p:cNvSpPr txBox="1"/>
-          <p:nvPr/>
-        </p:nvSpPr>
-        <p:spPr>
-          <a:xfrm>
-            <a:off x="4160520" y="1828800"/>
-            <a:ext cx="2103120" cy="292608"/>
-          </a:xfrm>
-          <a:prstGeom prst="rect">
-            <a:avLst/>
-          </a:prstGeom>
-          <a:noFill/>
-          <a:ln/>
-        </p:spPr>
-        <p:txBody>
-          <a:bodyPr wrap="square" lIns="0" tIns="0" rIns="0" bIns="0" rtlCol="0" anchor="t"/>
-          <a:lstStyle/>
-          <a:p>
-            <a:pPr eaLnBrk="0" indent="0" marL="0">
-              <a:buNone/>
-            </a:pPr>
-            <a:r>
-              <a:rPr lang="ko-KR" sz="1300" b="1" dirty="0">
-                <a:solidFill>
-                  <a:srgbClr val="1F8A5B"/>
-                </a:solidFill>
-                <a:latin typeface="Malgun Gothic" pitchFamily="34" charset="0"/>
-                <a:ea typeface="Malgun Gothic" pitchFamily="34" charset="-122"/>
-                <a:cs typeface="Malgun Gothic" pitchFamily="34" charset="-120"/>
-              </a:rPr>
-              <a:t>보정함 (팀 확정)</a:t>
-            </a:r>
-            <a:endParaRPr lang="ko-KR" sz="1300" dirty="0"/>
-          </a:p>
-        </p:txBody>
-      </p:sp>
-      <p:sp>
-        <p:nvSpPr>
-          <p:cNvPr id="6" name="Text 4"/>
-          <p:cNvSpPr txBox="1"/>
-          <p:nvPr/>
-        </p:nvSpPr>
-        <p:spPr>
-          <a:xfrm>
-            <a:off x="4160520" y="5349240"/>
-            <a:ext cx="365760" cy="365760"/>
-          </a:xfrm>
-          <a:prstGeom prst="rect">
-            <a:avLst/>
-          </a:prstGeom>
-          <a:noFill/>
-          <a:ln/>
-        </p:spPr>
-        <p:txBody>
-          <a:bodyPr wrap="square" lIns="0" tIns="0" rIns="0" bIns="0" rtlCol="0" anchor="t"/>
-          <a:lstStyle/>
-          <a:p>
-            <a:pPr eaLnBrk="0" algn="ctr" indent="0" marL="0">
-              <a:buNone/>
-            </a:pPr>
-            <a:r>
-              <a:rPr lang="ko-KR" sz="1600" dirty="0">
-                <a:solidFill>
-                  <a:srgbClr val="A9B2C0"/>
-                </a:solidFill>
-                <a:latin typeface="Malgun Gothic" pitchFamily="34" charset="0"/>
-                <a:ea typeface="Malgun Gothic" pitchFamily="34" charset="-122"/>
-                <a:cs typeface="Malgun Gothic" pitchFamily="34" charset="-120"/>
-              </a:rPr>
-              <a:t>⋮</a:t>
-            </a:r>
-            <a:endParaRPr lang="ko-KR" sz="1600" dirty="0"/>
-          </a:p>
-        </p:txBody>
-      </p:sp>
-      <p:sp>
-        <p:nvSpPr>
-          <p:cNvPr id="7" name="Shape 5"/>
-          <p:cNvSpPr/>
-          <p:nvPr/>
-        </p:nvSpPr>
-        <p:spPr>
-          <a:xfrm>
-            <a:off x="2697480" y="2523744"/>
-            <a:ext cx="1371600" cy="2377440"/>
-          </a:xfrm>
-          <a:prstGeom prst="line">
-            <a:avLst/>
-          </a:prstGeom>
-          <a:noFill/>
-          <a:ln w="38100">
-            <a:solidFill>
-              <a:srgbClr val="C2412D"/>
-            </a:solidFill>
-            <a:prstDash val="solid"/>
-          </a:ln>
-        </p:spPr>
-      </p:sp>
-      <p:sp>
-        <p:nvSpPr>
-          <p:cNvPr id="8" name="Shape 6"/>
-          <p:cNvSpPr/>
-          <p:nvPr/>
-        </p:nvSpPr>
-        <p:spPr>
-          <a:xfrm>
-            <a:off x="2633472" y="2459736"/>
-            <a:ext cx="128016" cy="128016"/>
-          </a:xfrm>
-          <a:prstGeom prst="ellipse">
-            <a:avLst/>
-          </a:prstGeom>
-          <a:solidFill>
-            <a:srgbClr val="C2412D"/>
-          </a:solidFill>
-          <a:ln/>
-        </p:spPr>
-      </p:sp>
-      <p:sp>
-        <p:nvSpPr>
-          <p:cNvPr id="9" name="Shape 7"/>
-          <p:cNvSpPr/>
-          <p:nvPr/>
-        </p:nvSpPr>
-        <p:spPr>
-          <a:xfrm>
-            <a:off x="4005072" y="4837176"/>
-            <a:ext cx="128016" cy="128016"/>
-          </a:xfrm>
-          <a:prstGeom prst="ellipse">
-            <a:avLst/>
-          </a:prstGeom>
-          <a:solidFill>
-            <a:srgbClr val="C2412D"/>
-          </a:solidFill>
-          <a:ln/>
-        </p:spPr>
-      </p:sp>
-      <p:sp>
-        <p:nvSpPr>
-          <p:cNvPr id="10" name="Text 8"/>
-          <p:cNvSpPr txBox="1"/>
-          <p:nvPr/>
-        </p:nvSpPr>
-        <p:spPr>
-          <a:xfrm>
-            <a:off x="731520" y="2377440"/>
-            <a:ext cx="1828800" cy="292608"/>
-          </a:xfrm>
-          <a:prstGeom prst="rect">
-            <a:avLst/>
-          </a:prstGeom>
-          <a:noFill/>
-          <a:ln/>
-        </p:spPr>
-        <p:txBody>
-          <a:bodyPr wrap="square" lIns="0" tIns="0" rIns="0" bIns="0" rtlCol="0" anchor="ctr"/>
-          <a:lstStyle/>
-          <a:p>
-            <a:pPr eaLnBrk="0" algn="r" indent="0" marL="0">
-              <a:buNone/>
-            </a:pPr>
-            <a:r>
-              <a:rPr lang="ko-KR" sz="1400" b="1" dirty="0">
-                <a:solidFill>
-                  <a:srgbClr val="1D2430"/>
-                </a:solidFill>
-                <a:latin typeface="Malgun Gothic" pitchFamily="34" charset="0"/>
-                <a:ea typeface="Malgun Gothic" pitchFamily="34" charset="-122"/>
-                <a:cs typeface="Malgun Gothic" pitchFamily="34" charset="-120"/>
-              </a:rPr>
-              <a:t>성북구  </a:t>
-            </a:r>
-            <a:pPr eaLnBrk="0" algn="r" indent="0" marL="0">
-              <a:buNone/>
-            </a:pPr>
-            <a:r>
-              <a:rPr lang="ko-KR" sz="1400" dirty="0">
-                <a:solidFill>
-                  <a:srgbClr val="6B7280"/>
-                </a:solidFill>
-                <a:latin typeface="Malgun Gothic" pitchFamily="34" charset="0"/>
-                <a:ea typeface="Malgun Gothic" pitchFamily="34" charset="-122"/>
-                <a:cs typeface="Malgun Gothic" pitchFamily="34" charset="-120"/>
-              </a:rPr>
-              <a:t>1위</a:t>
-            </a:r>
-            <a:endParaRPr lang="ko-KR" sz="1400" dirty="0"/>
-          </a:p>
-        </p:txBody>
-      </p:sp>
-      <p:sp>
-        <p:nvSpPr>
-          <p:cNvPr id="11" name="Text 9"/>
-          <p:cNvSpPr txBox="1"/>
-          <p:nvPr/>
-        </p:nvSpPr>
-        <p:spPr>
-          <a:xfrm>
-            <a:off x="4251960" y="4754880"/>
-            <a:ext cx="2286000" cy="292608"/>
-          </a:xfrm>
-          <a:prstGeom prst="rect">
-            <a:avLst/>
-          </a:prstGeom>
-          <a:noFill/>
-          <a:ln/>
-        </p:spPr>
-        <p:txBody>
-          <a:bodyPr wrap="square" lIns="0" tIns="0" rIns="0" bIns="0" rtlCol="0" anchor="ctr"/>
-          <a:lstStyle/>
-          <a:p>
-            <a:pPr eaLnBrk="0" indent="0" marL="0">
-              <a:buNone/>
-            </a:pPr>
-            <a:r>
-              <a:rPr lang="ko-KR" sz="1400" dirty="0">
-                <a:solidFill>
-                  <a:srgbClr val="6B7280"/>
-                </a:solidFill>
-                <a:latin typeface="Malgun Gothic" pitchFamily="34" charset="0"/>
-                <a:ea typeface="Malgun Gothic" pitchFamily="34" charset="-122"/>
-                <a:cs typeface="Malgun Gothic" pitchFamily="34" charset="-120"/>
-              </a:rPr>
-              <a:t>6위  </a:t>
-            </a:r>
-            <a:pPr eaLnBrk="0" indent="0" marL="0">
-              <a:buNone/>
-            </a:pPr>
-            <a:r>
-              <a:rPr lang="ko-KR" sz="1400" b="1" dirty="0">
-                <a:solidFill>
-                  <a:srgbClr val="C2412D"/>
-                </a:solidFill>
-                <a:latin typeface="Malgun Gothic" pitchFamily="34" charset="0"/>
-                <a:ea typeface="Malgun Gothic" pitchFamily="34" charset="-122"/>
-                <a:cs typeface="Malgun Gothic" pitchFamily="34" charset="-120"/>
-              </a:rPr>
-              <a:t>성북구 </a:t>
-            </a:r>
-            <a:pPr eaLnBrk="0" indent="0" marL="0">
-              <a:buNone/>
-            </a:pPr>
-            <a:r>
-              <a:rPr lang="ko-KR" sz="1200" dirty="0">
-                <a:solidFill>
-                  <a:srgbClr val="6B7280"/>
-                </a:solidFill>
-                <a:latin typeface="Malgun Gothic" pitchFamily="34" charset="0"/>
-                <a:ea typeface="Malgun Gothic" pitchFamily="34" charset="-122"/>
-                <a:cs typeface="Malgun Gothic" pitchFamily="34" charset="-120"/>
-              </a:rPr>
-              <a:t>17.93%</a:t>
-            </a:r>
-            <a:endParaRPr lang="ko-KR" sz="1400" dirty="0"/>
-          </a:p>
-        </p:txBody>
-      </p:sp>
-      <p:sp>
-        <p:nvSpPr>
-          <p:cNvPr id="12" name="Shape 10"/>
-          <p:cNvSpPr/>
-          <p:nvPr/>
-        </p:nvSpPr>
-        <p:spPr>
-          <a:xfrm flipV="1">
-            <a:off x="2697480" y="2523744"/>
-            <a:ext cx="1371600" cy="475488"/>
-          </a:xfrm>
-          <a:prstGeom prst="line">
-            <a:avLst/>
-          </a:prstGeom>
-          <a:noFill/>
-          <a:ln w="38100">
-            <a:solidFill>
-              <a:srgbClr val="1F8A5B"/>
-            </a:solidFill>
-            <a:prstDash val="solid"/>
-          </a:ln>
-        </p:spPr>
-      </p:sp>
-      <p:sp>
-        <p:nvSpPr>
-          <p:cNvPr id="13" name="Shape 11"/>
-          <p:cNvSpPr/>
-          <p:nvPr/>
-        </p:nvSpPr>
-        <p:spPr>
-          <a:xfrm>
-            <a:off x="2633472" y="2935224"/>
-            <a:ext cx="128016" cy="128016"/>
-          </a:xfrm>
-          <a:prstGeom prst="ellipse">
-            <a:avLst/>
-          </a:prstGeom>
-          <a:solidFill>
-            <a:srgbClr val="1F8A5B"/>
-          </a:solidFill>
-          <a:ln/>
-        </p:spPr>
-      </p:sp>
-      <p:sp>
-        <p:nvSpPr>
-          <p:cNvPr id="14" name="Shape 12"/>
-          <p:cNvSpPr/>
-          <p:nvPr/>
-        </p:nvSpPr>
-        <p:spPr>
-          <a:xfrm>
-            <a:off x="4005072" y="2459736"/>
-            <a:ext cx="128016" cy="128016"/>
-          </a:xfrm>
-          <a:prstGeom prst="ellipse">
-            <a:avLst/>
-          </a:prstGeom>
-          <a:solidFill>
-            <a:srgbClr val="1F8A5B"/>
-          </a:solidFill>
-          <a:ln/>
-        </p:spPr>
-      </p:sp>
-      <p:sp>
-        <p:nvSpPr>
-          <p:cNvPr id="15" name="Text 13"/>
-          <p:cNvSpPr txBox="1"/>
-          <p:nvPr/>
-        </p:nvSpPr>
-        <p:spPr>
-          <a:xfrm>
-            <a:off x="731520" y="2852928"/>
-            <a:ext cx="1828800" cy="292608"/>
-          </a:xfrm>
-          <a:prstGeom prst="rect">
-            <a:avLst/>
-          </a:prstGeom>
-          <a:noFill/>
-          <a:ln/>
-        </p:spPr>
-        <p:txBody>
-          <a:bodyPr wrap="square" lIns="0" tIns="0" rIns="0" bIns="0" rtlCol="0" anchor="ctr"/>
-          <a:lstStyle/>
-          <a:p>
-            <a:pPr eaLnBrk="0" algn="r" indent="0" marL="0">
-              <a:buNone/>
-            </a:pPr>
-            <a:r>
-              <a:rPr lang="ko-KR" sz="1400" b="1" dirty="0">
-                <a:solidFill>
-                  <a:srgbClr val="1D2430"/>
-                </a:solidFill>
-                <a:latin typeface="Malgun Gothic" pitchFamily="34" charset="0"/>
-                <a:ea typeface="Malgun Gothic" pitchFamily="34" charset="-122"/>
-                <a:cs typeface="Malgun Gothic" pitchFamily="34" charset="-120"/>
-              </a:rPr>
-              <a:t>영등포구  </a:t>
-            </a:r>
-            <a:pPr eaLnBrk="0" algn="r" indent="0" marL="0">
-              <a:buNone/>
-            </a:pPr>
-            <a:r>
-              <a:rPr lang="ko-KR" sz="1400" dirty="0">
-                <a:solidFill>
-                  <a:srgbClr val="6B7280"/>
-                </a:solidFill>
-                <a:latin typeface="Malgun Gothic" pitchFamily="34" charset="0"/>
-                <a:ea typeface="Malgun Gothic" pitchFamily="34" charset="-122"/>
-                <a:cs typeface="Malgun Gothic" pitchFamily="34" charset="-120"/>
-              </a:rPr>
-              <a:t>2위</a:t>
-            </a:r>
-            <a:endParaRPr lang="ko-KR" sz="1400" dirty="0"/>
-          </a:p>
-        </p:txBody>
-      </p:sp>
-      <p:sp>
-        <p:nvSpPr>
-          <p:cNvPr id="16" name="Text 14"/>
-          <p:cNvSpPr txBox="1"/>
-          <p:nvPr/>
-        </p:nvSpPr>
-        <p:spPr>
-          <a:xfrm>
-            <a:off x="4251960" y="2377440"/>
-            <a:ext cx="2286000" cy="292608"/>
-          </a:xfrm>
-          <a:prstGeom prst="rect">
-            <a:avLst/>
-          </a:prstGeom>
-          <a:noFill/>
-          <a:ln/>
-        </p:spPr>
-        <p:txBody>
-          <a:bodyPr wrap="square" lIns="0" tIns="0" rIns="0" bIns="0" rtlCol="0" anchor="ctr"/>
-          <a:lstStyle/>
-          <a:p>
-            <a:pPr eaLnBrk="0" indent="0" marL="0">
-              <a:buNone/>
-            </a:pPr>
-            <a:r>
-              <a:rPr lang="ko-KR" sz="1400" dirty="0">
-                <a:solidFill>
-                  <a:srgbClr val="6B7280"/>
-                </a:solidFill>
-                <a:latin typeface="Malgun Gothic" pitchFamily="34" charset="0"/>
-                <a:ea typeface="Malgun Gothic" pitchFamily="34" charset="-122"/>
-                <a:cs typeface="Malgun Gothic" pitchFamily="34" charset="-120"/>
-              </a:rPr>
-              <a:t>1위  </a:t>
-            </a:r>
-            <a:pPr eaLnBrk="0" indent="0" marL="0">
-              <a:buNone/>
-            </a:pPr>
-            <a:r>
-              <a:rPr lang="ko-KR" sz="1400" b="1" dirty="0">
-                <a:solidFill>
-                  <a:srgbClr val="1F8A5B"/>
-                </a:solidFill>
-                <a:latin typeface="Malgun Gothic" pitchFamily="34" charset="0"/>
-                <a:ea typeface="Malgun Gothic" pitchFamily="34" charset="-122"/>
-                <a:cs typeface="Malgun Gothic" pitchFamily="34" charset="-120"/>
-              </a:rPr>
-              <a:t>영등포구 </a:t>
-            </a:r>
-            <a:pPr eaLnBrk="0" indent="0" marL="0">
-              <a:buNone/>
-            </a:pPr>
-            <a:r>
-              <a:rPr lang="ko-KR" sz="1200" dirty="0">
-                <a:solidFill>
-                  <a:srgbClr val="6B7280"/>
-                </a:solidFill>
-                <a:latin typeface="Malgun Gothic" pitchFamily="34" charset="0"/>
-                <a:ea typeface="Malgun Gothic" pitchFamily="34" charset="-122"/>
-                <a:cs typeface="Malgun Gothic" pitchFamily="34" charset="-120"/>
-              </a:rPr>
-              <a:t>18.86%</a:t>
-            </a:r>
-            <a:endParaRPr lang="ko-KR" sz="1400" dirty="0"/>
-          </a:p>
-        </p:txBody>
-      </p:sp>
-      <p:sp>
-        <p:nvSpPr>
-          <p:cNvPr id="17" name="Shape 15"/>
-          <p:cNvSpPr/>
-          <p:nvPr/>
-        </p:nvSpPr>
-        <p:spPr>
-          <a:xfrm>
-            <a:off x="2697480" y="3474720"/>
-            <a:ext cx="1371600" cy="0"/>
-          </a:xfrm>
-          <a:prstGeom prst="line">
-            <a:avLst/>
-          </a:prstGeom>
-          <a:noFill/>
-          <a:ln w="19050">
-            <a:solidFill>
-              <a:srgbClr val="AEB6C2"/>
-            </a:solidFill>
-            <a:prstDash val="solid"/>
-          </a:ln>
-        </p:spPr>
-      </p:sp>
-      <p:sp>
-        <p:nvSpPr>
-          <p:cNvPr id="18" name="Shape 16"/>
-          <p:cNvSpPr/>
-          <p:nvPr/>
-        </p:nvSpPr>
-        <p:spPr>
-          <a:xfrm>
-            <a:off x="2633472" y="3410712"/>
-            <a:ext cx="128016" cy="128016"/>
-          </a:xfrm>
-          <a:prstGeom prst="ellipse">
-            <a:avLst/>
-          </a:prstGeom>
-          <a:solidFill>
-            <a:srgbClr val="AEB6C2"/>
-          </a:solidFill>
-          <a:ln/>
-        </p:spPr>
-      </p:sp>
-      <p:sp>
-        <p:nvSpPr>
-          <p:cNvPr id="19" name="Shape 17"/>
-          <p:cNvSpPr/>
-          <p:nvPr/>
-        </p:nvSpPr>
-        <p:spPr>
-          <a:xfrm>
-            <a:off x="4005072" y="3410712"/>
-            <a:ext cx="128016" cy="128016"/>
-          </a:xfrm>
-          <a:prstGeom prst="ellipse">
-            <a:avLst/>
-          </a:prstGeom>
-          <a:solidFill>
-            <a:srgbClr val="AEB6C2"/>
-          </a:solidFill>
-          <a:ln/>
-        </p:spPr>
-      </p:sp>
-      <p:sp>
-        <p:nvSpPr>
-          <p:cNvPr id="20" name="Text 18"/>
-          <p:cNvSpPr txBox="1"/>
-          <p:nvPr/>
-        </p:nvSpPr>
-        <p:spPr>
-          <a:xfrm>
-            <a:off x="731520" y="3328416"/>
-            <a:ext cx="1828800" cy="292608"/>
-          </a:xfrm>
-          <a:prstGeom prst="rect">
-            <a:avLst/>
-          </a:prstGeom>
-          <a:noFill/>
-          <a:ln/>
-        </p:spPr>
-        <p:txBody>
-          <a:bodyPr wrap="square" lIns="0" tIns="0" rIns="0" bIns="0" rtlCol="0" anchor="ctr"/>
-          <a:lstStyle/>
-          <a:p>
-            <a:pPr eaLnBrk="0" algn="r" indent="0" marL="0">
-              <a:buNone/>
-            </a:pPr>
-            <a:r>
-              <a:rPr lang="ko-KR" sz="1400" dirty="0">
-                <a:solidFill>
-                  <a:srgbClr val="5B6472"/>
-                </a:solidFill>
-                <a:latin typeface="Malgun Gothic" pitchFamily="34" charset="0"/>
-                <a:ea typeface="Malgun Gothic" pitchFamily="34" charset="-122"/>
-                <a:cs typeface="Malgun Gothic" pitchFamily="34" charset="-120"/>
-              </a:rPr>
-              <a:t>중랑구  </a:t>
-            </a:r>
-            <a:pPr eaLnBrk="0" algn="r" indent="0" marL="0">
-              <a:buNone/>
-            </a:pPr>
-            <a:r>
-              <a:rPr lang="ko-KR" sz="1400" dirty="0">
-                <a:solidFill>
-                  <a:srgbClr val="6B7280"/>
-                </a:solidFill>
-                <a:latin typeface="Malgun Gothic" pitchFamily="34" charset="0"/>
-                <a:ea typeface="Malgun Gothic" pitchFamily="34" charset="-122"/>
-                <a:cs typeface="Malgun Gothic" pitchFamily="34" charset="-120"/>
-              </a:rPr>
-              <a:t>3위</a:t>
-            </a:r>
-            <a:endParaRPr lang="ko-KR" sz="1400" dirty="0"/>
-          </a:p>
-        </p:txBody>
-      </p:sp>
-      <p:sp>
-        <p:nvSpPr>
-          <p:cNvPr id="21" name="Text 19"/>
-          <p:cNvSpPr txBox="1"/>
-          <p:nvPr/>
-        </p:nvSpPr>
-        <p:spPr>
-          <a:xfrm>
-            <a:off x="4251960" y="3328416"/>
-            <a:ext cx="2286000" cy="292608"/>
-          </a:xfrm>
-          <a:prstGeom prst="rect">
-            <a:avLst/>
-          </a:prstGeom>
-          <a:noFill/>
-          <a:ln/>
-        </p:spPr>
-        <p:txBody>
-          <a:bodyPr wrap="square" lIns="0" tIns="0" rIns="0" bIns="0" rtlCol="0" anchor="ctr"/>
-          <a:lstStyle/>
-          <a:p>
-            <a:pPr eaLnBrk="0" indent="0" marL="0">
-              <a:buNone/>
-            </a:pPr>
-            <a:r>
-              <a:rPr lang="ko-KR" sz="1400" dirty="0">
-                <a:solidFill>
-                  <a:srgbClr val="6B7280"/>
-                </a:solidFill>
-                <a:latin typeface="Malgun Gothic" pitchFamily="34" charset="0"/>
-                <a:ea typeface="Malgun Gothic" pitchFamily="34" charset="-122"/>
-                <a:cs typeface="Malgun Gothic" pitchFamily="34" charset="-120"/>
-              </a:rPr>
-              <a:t>3위  </a:t>
-            </a:r>
-            <a:pPr eaLnBrk="0" indent="0" marL="0">
-              <a:buNone/>
-            </a:pPr>
-            <a:r>
-              <a:rPr lang="ko-KR" sz="1400" dirty="0">
-                <a:solidFill>
-                  <a:srgbClr val="5B6472"/>
-                </a:solidFill>
-                <a:latin typeface="Malgun Gothic" pitchFamily="34" charset="0"/>
-                <a:ea typeface="Malgun Gothic" pitchFamily="34" charset="-122"/>
-                <a:cs typeface="Malgun Gothic" pitchFamily="34" charset="-120"/>
-              </a:rPr>
-              <a:t>중랑구 </a:t>
-            </a:r>
-            <a:pPr eaLnBrk="0" indent="0" marL="0">
-              <a:buNone/>
-            </a:pPr>
-            <a:r>
-              <a:rPr lang="ko-KR" sz="1200" dirty="0">
-                <a:solidFill>
-                  <a:srgbClr val="6B7280"/>
-                </a:solidFill>
-                <a:latin typeface="Malgun Gothic" pitchFamily="34" charset="0"/>
-                <a:ea typeface="Malgun Gothic" pitchFamily="34" charset="-122"/>
-                <a:cs typeface="Malgun Gothic" pitchFamily="34" charset="-120"/>
-              </a:rPr>
-              <a:t>18.55%</a:t>
-            </a:r>
-            <a:endParaRPr lang="ko-KR" sz="1400" dirty="0"/>
-          </a:p>
-        </p:txBody>
-      </p:sp>
-      <p:sp>
-        <p:nvSpPr>
-          <p:cNvPr id="22" name="Shape 20"/>
-          <p:cNvSpPr/>
-          <p:nvPr/>
-        </p:nvSpPr>
-        <p:spPr>
-          <a:xfrm>
-            <a:off x="2697480" y="3950208"/>
-            <a:ext cx="1371600" cy="0"/>
-          </a:xfrm>
-          <a:prstGeom prst="line">
-            <a:avLst/>
-          </a:prstGeom>
-          <a:noFill/>
-          <a:ln w="19050">
-            <a:solidFill>
-              <a:srgbClr val="AEB6C2"/>
-            </a:solidFill>
-            <a:prstDash val="solid"/>
-          </a:ln>
-        </p:spPr>
-      </p:sp>
-      <p:sp>
-        <p:nvSpPr>
-          <p:cNvPr id="23" name="Shape 21"/>
-          <p:cNvSpPr/>
-          <p:nvPr/>
-        </p:nvSpPr>
-        <p:spPr>
-          <a:xfrm>
-            <a:off x="2633472" y="3886200"/>
-            <a:ext cx="128016" cy="128016"/>
-          </a:xfrm>
-          <a:prstGeom prst="ellipse">
-            <a:avLst/>
-          </a:prstGeom>
-          <a:solidFill>
-            <a:srgbClr val="AEB6C2"/>
-          </a:solidFill>
-          <a:ln/>
-        </p:spPr>
-      </p:sp>
-      <p:sp>
-        <p:nvSpPr>
-          <p:cNvPr id="24" name="Shape 22"/>
-          <p:cNvSpPr/>
-          <p:nvPr/>
-        </p:nvSpPr>
-        <p:spPr>
-          <a:xfrm>
-            <a:off x="4005072" y="3886200"/>
-            <a:ext cx="128016" cy="128016"/>
-          </a:xfrm>
-          <a:prstGeom prst="ellipse">
-            <a:avLst/>
-          </a:prstGeom>
-          <a:solidFill>
-            <a:srgbClr val="AEB6C2"/>
-          </a:solidFill>
-          <a:ln/>
-        </p:spPr>
-      </p:sp>
-      <p:sp>
-        <p:nvSpPr>
-          <p:cNvPr id="25" name="Text 23"/>
-          <p:cNvSpPr txBox="1"/>
-          <p:nvPr/>
-        </p:nvSpPr>
-        <p:spPr>
-          <a:xfrm>
-            <a:off x="731520" y="3803904"/>
-            <a:ext cx="1828800" cy="292608"/>
-          </a:xfrm>
-          <a:prstGeom prst="rect">
-            <a:avLst/>
-          </a:prstGeom>
-          <a:noFill/>
-          <a:ln/>
-        </p:spPr>
-        <p:txBody>
-          <a:bodyPr wrap="square" lIns="0" tIns="0" rIns="0" bIns="0" rtlCol="0" anchor="ctr"/>
-          <a:lstStyle/>
-          <a:p>
-            <a:pPr eaLnBrk="0" algn="r" indent="0" marL="0">
-              <a:buNone/>
-            </a:pPr>
-            <a:r>
-              <a:rPr lang="ko-KR" sz="1400" dirty="0">
-                <a:solidFill>
-                  <a:srgbClr val="5B6472"/>
-                </a:solidFill>
-                <a:latin typeface="Malgun Gothic" pitchFamily="34" charset="0"/>
-                <a:ea typeface="Malgun Gothic" pitchFamily="34" charset="-122"/>
-                <a:cs typeface="Malgun Gothic" pitchFamily="34" charset="-120"/>
-              </a:rPr>
-              <a:t>서대문구  </a:t>
-            </a:r>
-            <a:pPr eaLnBrk="0" algn="r" indent="0" marL="0">
-              <a:buNone/>
-            </a:pPr>
-            <a:r>
-              <a:rPr lang="ko-KR" sz="1400" dirty="0">
-                <a:solidFill>
-                  <a:srgbClr val="6B7280"/>
-                </a:solidFill>
-                <a:latin typeface="Malgun Gothic" pitchFamily="34" charset="0"/>
-                <a:ea typeface="Malgun Gothic" pitchFamily="34" charset="-122"/>
-                <a:cs typeface="Malgun Gothic" pitchFamily="34" charset="-120"/>
-              </a:rPr>
-              <a:t>4위</a:t>
-            </a:r>
-            <a:endParaRPr lang="ko-KR" sz="1400" dirty="0"/>
-          </a:p>
-        </p:txBody>
-      </p:sp>
-      <p:sp>
-        <p:nvSpPr>
-          <p:cNvPr id="26" name="Text 24"/>
-          <p:cNvSpPr txBox="1"/>
-          <p:nvPr/>
-        </p:nvSpPr>
-        <p:spPr>
-          <a:xfrm>
-            <a:off x="4251960" y="3803904"/>
-            <a:ext cx="2286000" cy="292608"/>
-          </a:xfrm>
-          <a:prstGeom prst="rect">
-            <a:avLst/>
-          </a:prstGeom>
-          <a:noFill/>
-          <a:ln/>
-        </p:spPr>
-        <p:txBody>
-          <a:bodyPr wrap="square" lIns="0" tIns="0" rIns="0" bIns="0" rtlCol="0" anchor="ctr"/>
-          <a:lstStyle/>
-          <a:p>
-            <a:pPr eaLnBrk="0" indent="0" marL="0">
-              <a:buNone/>
-            </a:pPr>
-            <a:r>
-              <a:rPr lang="ko-KR" sz="1400" dirty="0">
-                <a:solidFill>
-                  <a:srgbClr val="6B7280"/>
-                </a:solidFill>
-                <a:latin typeface="Malgun Gothic" pitchFamily="34" charset="0"/>
-                <a:ea typeface="Malgun Gothic" pitchFamily="34" charset="-122"/>
-                <a:cs typeface="Malgun Gothic" pitchFamily="34" charset="-120"/>
-              </a:rPr>
-              <a:t>4위  </a:t>
-            </a:r>
-            <a:pPr eaLnBrk="0" indent="0" marL="0">
-              <a:buNone/>
-            </a:pPr>
-            <a:r>
-              <a:rPr lang="ko-KR" sz="1400" dirty="0">
-                <a:solidFill>
-                  <a:srgbClr val="5B6472"/>
-                </a:solidFill>
-                <a:latin typeface="Malgun Gothic" pitchFamily="34" charset="0"/>
-                <a:ea typeface="Malgun Gothic" pitchFamily="34" charset="-122"/>
-                <a:cs typeface="Malgun Gothic" pitchFamily="34" charset="-120"/>
-              </a:rPr>
-              <a:t>서대문구 </a:t>
-            </a:r>
-            <a:pPr eaLnBrk="0" indent="0" marL="0">
-              <a:buNone/>
-            </a:pPr>
-            <a:r>
-              <a:rPr lang="ko-KR" sz="1200" dirty="0">
-                <a:solidFill>
-                  <a:srgbClr val="6B7280"/>
-                </a:solidFill>
-                <a:latin typeface="Malgun Gothic" pitchFamily="34" charset="0"/>
-                <a:ea typeface="Malgun Gothic" pitchFamily="34" charset="-122"/>
-                <a:cs typeface="Malgun Gothic" pitchFamily="34" charset="-120"/>
-              </a:rPr>
-              <a:t>18.38%</a:t>
-            </a:r>
-            <a:endParaRPr lang="ko-KR" sz="1400" dirty="0"/>
-          </a:p>
-        </p:txBody>
-      </p:sp>
-      <p:sp>
-        <p:nvSpPr>
-          <p:cNvPr id="27" name="Shape 25"/>
-          <p:cNvSpPr/>
-          <p:nvPr/>
-        </p:nvSpPr>
-        <p:spPr>
-          <a:xfrm>
-            <a:off x="2697480" y="4425696"/>
-            <a:ext cx="1371600" cy="0"/>
-          </a:xfrm>
-          <a:prstGeom prst="line">
-            <a:avLst/>
-          </a:prstGeom>
-          <a:noFill/>
-          <a:ln w="19050">
-            <a:solidFill>
-              <a:srgbClr val="AEB6C2"/>
-            </a:solidFill>
-            <a:prstDash val="solid"/>
-          </a:ln>
-        </p:spPr>
-      </p:sp>
-      <p:sp>
-        <p:nvSpPr>
-          <p:cNvPr id="28" name="Shape 26"/>
-          <p:cNvSpPr/>
-          <p:nvPr/>
-        </p:nvSpPr>
-        <p:spPr>
-          <a:xfrm>
-            <a:off x="2633472" y="4361688"/>
-            <a:ext cx="128016" cy="128016"/>
-          </a:xfrm>
-          <a:prstGeom prst="ellipse">
-            <a:avLst/>
-          </a:prstGeom>
-          <a:solidFill>
-            <a:srgbClr val="AEB6C2"/>
-          </a:solidFill>
-          <a:ln/>
-        </p:spPr>
-      </p:sp>
-      <p:sp>
-        <p:nvSpPr>
-          <p:cNvPr id="29" name="Shape 27"/>
-          <p:cNvSpPr/>
-          <p:nvPr/>
-        </p:nvSpPr>
-        <p:spPr>
-          <a:xfrm>
-            <a:off x="4005072" y="4361688"/>
-            <a:ext cx="128016" cy="128016"/>
-          </a:xfrm>
-          <a:prstGeom prst="ellipse">
-            <a:avLst/>
-          </a:prstGeom>
-          <a:solidFill>
-            <a:srgbClr val="AEB6C2"/>
-          </a:solidFill>
-          <a:ln/>
-        </p:spPr>
-      </p:sp>
-      <p:sp>
-        <p:nvSpPr>
-          <p:cNvPr id="30" name="Text 28"/>
-          <p:cNvSpPr txBox="1"/>
-          <p:nvPr/>
-        </p:nvSpPr>
-        <p:spPr>
-          <a:xfrm>
-            <a:off x="731520" y="4279392"/>
-            <a:ext cx="1828800" cy="292608"/>
-          </a:xfrm>
-          <a:prstGeom prst="rect">
-            <a:avLst/>
-          </a:prstGeom>
-          <a:noFill/>
-          <a:ln/>
-        </p:spPr>
-        <p:txBody>
-          <a:bodyPr wrap="square" lIns="0" tIns="0" rIns="0" bIns="0" rtlCol="0" anchor="ctr"/>
-          <a:lstStyle/>
-          <a:p>
-            <a:pPr eaLnBrk="0" algn="r" indent="0" marL="0">
-              <a:buNone/>
-            </a:pPr>
-            <a:r>
-              <a:rPr lang="ko-KR" sz="1400" dirty="0">
-                <a:solidFill>
-                  <a:srgbClr val="5B6472"/>
-                </a:solidFill>
-                <a:latin typeface="Malgun Gothic" pitchFamily="34" charset="0"/>
-                <a:ea typeface="Malgun Gothic" pitchFamily="34" charset="-122"/>
-                <a:cs typeface="Malgun Gothic" pitchFamily="34" charset="-120"/>
-              </a:rPr>
-              <a:t>금천구  </a:t>
-            </a:r>
-            <a:pPr eaLnBrk="0" algn="r" indent="0" marL="0">
-              <a:buNone/>
-            </a:pPr>
-            <a:r>
-              <a:rPr lang="ko-KR" sz="1400" dirty="0">
-                <a:solidFill>
-                  <a:srgbClr val="6B7280"/>
-                </a:solidFill>
-                <a:latin typeface="Malgun Gothic" pitchFamily="34" charset="0"/>
-                <a:ea typeface="Malgun Gothic" pitchFamily="34" charset="-122"/>
-                <a:cs typeface="Malgun Gothic" pitchFamily="34" charset="-120"/>
-              </a:rPr>
-              <a:t>5위</a:t>
-            </a:r>
-            <a:endParaRPr lang="ko-KR" sz="1400" dirty="0"/>
-          </a:p>
-        </p:txBody>
-      </p:sp>
-      <p:sp>
-        <p:nvSpPr>
-          <p:cNvPr id="31" name="Text 29"/>
-          <p:cNvSpPr txBox="1"/>
-          <p:nvPr/>
-        </p:nvSpPr>
-        <p:spPr>
-          <a:xfrm>
-            <a:off x="4251960" y="4279392"/>
-            <a:ext cx="2286000" cy="292608"/>
-          </a:xfrm>
-          <a:prstGeom prst="rect">
-            <a:avLst/>
-          </a:prstGeom>
-          <a:noFill/>
-          <a:ln/>
-        </p:spPr>
-        <p:txBody>
-          <a:bodyPr wrap="square" lIns="0" tIns="0" rIns="0" bIns="0" rtlCol="0" anchor="ctr"/>
-          <a:lstStyle/>
-          <a:p>
-            <a:pPr eaLnBrk="0" indent="0" marL="0">
-              <a:buNone/>
-            </a:pPr>
-            <a:r>
-              <a:rPr lang="ko-KR" sz="1400" dirty="0">
-                <a:solidFill>
-                  <a:srgbClr val="6B7280"/>
-                </a:solidFill>
-                <a:latin typeface="Malgun Gothic" pitchFamily="34" charset="0"/>
-                <a:ea typeface="Malgun Gothic" pitchFamily="34" charset="-122"/>
-                <a:cs typeface="Malgun Gothic" pitchFamily="34" charset="-120"/>
-              </a:rPr>
-              <a:t>5위  </a:t>
-            </a:r>
-            <a:pPr eaLnBrk="0" indent="0" marL="0">
-              <a:buNone/>
-            </a:pPr>
-            <a:r>
-              <a:rPr lang="ko-KR" sz="1400" dirty="0">
-                <a:solidFill>
-                  <a:srgbClr val="5B6472"/>
-                </a:solidFill>
-                <a:latin typeface="Malgun Gothic" pitchFamily="34" charset="0"/>
-                <a:ea typeface="Malgun Gothic" pitchFamily="34" charset="-122"/>
-                <a:cs typeface="Malgun Gothic" pitchFamily="34" charset="-120"/>
-              </a:rPr>
-              <a:t>금천구 </a:t>
-            </a:r>
-            <a:pPr eaLnBrk="0" indent="0" marL="0">
-              <a:buNone/>
-            </a:pPr>
-            <a:r>
-              <a:rPr lang="ko-KR" sz="1200" dirty="0">
-                <a:solidFill>
-                  <a:srgbClr val="6B7280"/>
-                </a:solidFill>
-                <a:latin typeface="Malgun Gothic" pitchFamily="34" charset="0"/>
-                <a:ea typeface="Malgun Gothic" pitchFamily="34" charset="-122"/>
-                <a:cs typeface="Malgun Gothic" pitchFamily="34" charset="-120"/>
-              </a:rPr>
-              <a:t>17.97%</a:t>
-            </a:r>
-            <a:endParaRPr lang="ko-KR" sz="1400" dirty="0"/>
-          </a:p>
-        </p:txBody>
-      </p:sp>
-      <p:sp>
-        <p:nvSpPr>
-          <p:cNvPr id="32" name="Shape 30"/>
-          <p:cNvSpPr/>
-          <p:nvPr/>
-        </p:nvSpPr>
-        <p:spPr>
-          <a:xfrm>
-            <a:off x="2697480" y="4901184"/>
-            <a:ext cx="1371600" cy="1051560"/>
-          </a:xfrm>
-          <a:prstGeom prst="line">
-            <a:avLst/>
-          </a:prstGeom>
-          <a:noFill/>
-          <a:ln w="38100">
-            <a:solidFill>
-              <a:srgbClr val="C2412D"/>
-            </a:solidFill>
-            <a:prstDash val="solid"/>
-          </a:ln>
-        </p:spPr>
-      </p:sp>
-      <p:sp>
-        <p:nvSpPr>
-          <p:cNvPr id="33" name="Shape 31"/>
-          <p:cNvSpPr/>
-          <p:nvPr/>
-        </p:nvSpPr>
-        <p:spPr>
-          <a:xfrm>
-            <a:off x="2633472" y="4837176"/>
-            <a:ext cx="128016" cy="128016"/>
-          </a:xfrm>
-          <a:prstGeom prst="ellipse">
-            <a:avLst/>
-          </a:prstGeom>
-          <a:solidFill>
-            <a:srgbClr val="C2412D"/>
-          </a:solidFill>
-          <a:ln/>
-        </p:spPr>
-      </p:sp>
-      <p:sp>
-        <p:nvSpPr>
-          <p:cNvPr id="34" name="Shape 32"/>
-          <p:cNvSpPr/>
-          <p:nvPr/>
-        </p:nvSpPr>
-        <p:spPr>
-          <a:xfrm>
-            <a:off x="4005072" y="5888736"/>
-            <a:ext cx="128016" cy="128016"/>
-          </a:xfrm>
-          <a:prstGeom prst="ellipse">
-            <a:avLst/>
-          </a:prstGeom>
-          <a:solidFill>
-            <a:srgbClr val="C2412D"/>
-          </a:solidFill>
-          <a:ln/>
-        </p:spPr>
-      </p:sp>
-      <p:sp>
-        <p:nvSpPr>
-          <p:cNvPr id="35" name="Text 33"/>
-          <p:cNvSpPr txBox="1"/>
-          <p:nvPr/>
-        </p:nvSpPr>
-        <p:spPr>
-          <a:xfrm>
-            <a:off x="731520" y="4754880"/>
-            <a:ext cx="1828800" cy="292608"/>
-          </a:xfrm>
-          <a:prstGeom prst="rect">
-            <a:avLst/>
-          </a:prstGeom>
-          <a:noFill/>
-          <a:ln/>
-        </p:spPr>
-        <p:txBody>
-          <a:bodyPr wrap="square" lIns="0" tIns="0" rIns="0" bIns="0" rtlCol="0" anchor="ctr"/>
-          <a:lstStyle/>
-          <a:p>
-            <a:pPr eaLnBrk="0" algn="r" indent="0" marL="0">
-              <a:buNone/>
-            </a:pPr>
-            <a:r>
-              <a:rPr lang="ko-KR" sz="1400" b="1" dirty="0">
-                <a:solidFill>
-                  <a:srgbClr val="1D2430"/>
-                </a:solidFill>
-                <a:latin typeface="Malgun Gothic" pitchFamily="34" charset="0"/>
-                <a:ea typeface="Malgun Gothic" pitchFamily="34" charset="-122"/>
-                <a:cs typeface="Malgun Gothic" pitchFamily="34" charset="-120"/>
-              </a:rPr>
-              <a:t>양천구  </a:t>
-            </a:r>
-            <a:pPr eaLnBrk="0" algn="r" indent="0" marL="0">
-              <a:buNone/>
-            </a:pPr>
-            <a:r>
-              <a:rPr lang="ko-KR" sz="1400" dirty="0">
-                <a:solidFill>
-                  <a:srgbClr val="6B7280"/>
-                </a:solidFill>
-                <a:latin typeface="Malgun Gothic" pitchFamily="34" charset="0"/>
-                <a:ea typeface="Malgun Gothic" pitchFamily="34" charset="-122"/>
-                <a:cs typeface="Malgun Gothic" pitchFamily="34" charset="-120"/>
-              </a:rPr>
-              <a:t>6위</a:t>
-            </a:r>
-            <a:endParaRPr lang="ko-KR" sz="1400" dirty="0"/>
-          </a:p>
-        </p:txBody>
-      </p:sp>
-      <p:sp>
-        <p:nvSpPr>
-          <p:cNvPr id="36" name="Text 34"/>
-          <p:cNvSpPr txBox="1"/>
-          <p:nvPr/>
-        </p:nvSpPr>
-        <p:spPr>
-          <a:xfrm>
-            <a:off x="4251960" y="5806440"/>
-            <a:ext cx="2286000" cy="292608"/>
-          </a:xfrm>
-          <a:prstGeom prst="rect">
-            <a:avLst/>
-          </a:prstGeom>
-          <a:noFill/>
-          <a:ln/>
-        </p:spPr>
-        <p:txBody>
-          <a:bodyPr wrap="square" lIns="0" tIns="0" rIns="0" bIns="0" rtlCol="0" anchor="ctr"/>
-          <a:lstStyle/>
-          <a:p>
-            <a:pPr eaLnBrk="0" indent="0" marL="0">
-              <a:buNone/>
-            </a:pPr>
-            <a:r>
-              <a:rPr lang="ko-KR" sz="1400" dirty="0">
-                <a:solidFill>
-                  <a:srgbClr val="6B7280"/>
-                </a:solidFill>
-                <a:latin typeface="Malgun Gothic" pitchFamily="34" charset="0"/>
-                <a:ea typeface="Malgun Gothic" pitchFamily="34" charset="-122"/>
-                <a:cs typeface="Malgun Gothic" pitchFamily="34" charset="-120"/>
-              </a:rPr>
-              <a:t>13위  </a:t>
-            </a:r>
-            <a:pPr eaLnBrk="0" indent="0" marL="0">
-              <a:buNone/>
-            </a:pPr>
-            <a:r>
-              <a:rPr lang="ko-KR" sz="1400" b="1" dirty="0">
-                <a:solidFill>
-                  <a:srgbClr val="C2412D"/>
-                </a:solidFill>
-                <a:latin typeface="Malgun Gothic" pitchFamily="34" charset="0"/>
-                <a:ea typeface="Malgun Gothic" pitchFamily="34" charset="-122"/>
-                <a:cs typeface="Malgun Gothic" pitchFamily="34" charset="-120"/>
-              </a:rPr>
-              <a:t>양천구 </a:t>
-            </a:r>
-            <a:pPr eaLnBrk="0" indent="0" marL="0">
-              <a:buNone/>
-            </a:pPr>
-            <a:r>
-              <a:rPr lang="ko-KR" sz="1200" dirty="0">
-                <a:solidFill>
-                  <a:srgbClr val="6B7280"/>
-                </a:solidFill>
-                <a:latin typeface="Malgun Gothic" pitchFamily="34" charset="0"/>
-                <a:ea typeface="Malgun Gothic" pitchFamily="34" charset="-122"/>
-                <a:cs typeface="Malgun Gothic" pitchFamily="34" charset="-120"/>
-              </a:rPr>
-              <a:t>16.76%</a:t>
-            </a:r>
-            <a:endParaRPr lang="ko-KR" sz="1400" dirty="0"/>
-          </a:p>
-        </p:txBody>
-      </p:sp>
-      <p:sp>
-        <p:nvSpPr>
-          <p:cNvPr id="37" name="Shape 35"/>
-          <p:cNvSpPr/>
-          <p:nvPr/>
-        </p:nvSpPr>
-        <p:spPr>
-          <a:xfrm flipV="1">
-            <a:off x="2697480" y="2999232"/>
-            <a:ext cx="1371600" cy="2377440"/>
-          </a:xfrm>
-          <a:prstGeom prst="line">
-            <a:avLst/>
-          </a:prstGeom>
-          <a:noFill/>
-          <a:ln w="38100">
-            <a:solidFill>
-              <a:srgbClr val="1F8A5B"/>
-            </a:solidFill>
-            <a:prstDash val="solid"/>
-          </a:ln>
-        </p:spPr>
-      </p:sp>
-      <p:sp>
-        <p:nvSpPr>
-          <p:cNvPr id="38" name="Shape 36"/>
-          <p:cNvSpPr/>
-          <p:nvPr/>
-        </p:nvSpPr>
-        <p:spPr>
-          <a:xfrm>
-            <a:off x="2633472" y="5312664"/>
-            <a:ext cx="128016" cy="128016"/>
-          </a:xfrm>
-          <a:prstGeom prst="ellipse">
-            <a:avLst/>
-          </a:prstGeom>
-          <a:solidFill>
-            <a:srgbClr val="1F8A5B"/>
-          </a:solidFill>
-          <a:ln/>
-        </p:spPr>
-      </p:sp>
-      <p:sp>
-        <p:nvSpPr>
-          <p:cNvPr id="39" name="Shape 37"/>
-          <p:cNvSpPr/>
-          <p:nvPr/>
-        </p:nvSpPr>
-        <p:spPr>
-          <a:xfrm>
-            <a:off x="4005072" y="2935224"/>
-            <a:ext cx="128016" cy="128016"/>
-          </a:xfrm>
-          <a:prstGeom prst="ellipse">
-            <a:avLst/>
-          </a:prstGeom>
-          <a:solidFill>
-            <a:srgbClr val="1F8A5B"/>
-          </a:solidFill>
-          <a:ln/>
-        </p:spPr>
-      </p:sp>
-      <p:sp>
-        <p:nvSpPr>
-          <p:cNvPr id="40" name="Text 38"/>
-          <p:cNvSpPr txBox="1"/>
-          <p:nvPr/>
-        </p:nvSpPr>
-        <p:spPr>
-          <a:xfrm>
-            <a:off x="731520" y="5230368"/>
-            <a:ext cx="1828800" cy="292608"/>
-          </a:xfrm>
-          <a:prstGeom prst="rect">
-            <a:avLst/>
-          </a:prstGeom>
-          <a:noFill/>
-          <a:ln/>
-        </p:spPr>
-        <p:txBody>
-          <a:bodyPr wrap="square" lIns="0" tIns="0" rIns="0" bIns="0" rtlCol="0" anchor="ctr"/>
-          <a:lstStyle/>
-          <a:p>
-            <a:pPr eaLnBrk="0" algn="r" indent="0" marL="0">
-              <a:buNone/>
-            </a:pPr>
-            <a:r>
-              <a:rPr lang="ko-KR" sz="1400" b="1" dirty="0">
-                <a:solidFill>
-                  <a:srgbClr val="1D2430"/>
-                </a:solidFill>
-                <a:latin typeface="Malgun Gothic" pitchFamily="34" charset="0"/>
-                <a:ea typeface="Malgun Gothic" pitchFamily="34" charset="-122"/>
-                <a:cs typeface="Malgun Gothic" pitchFamily="34" charset="-120"/>
-              </a:rPr>
-              <a:t>노원구  </a:t>
-            </a:r>
-            <a:pPr eaLnBrk="0" algn="r" indent="0" marL="0">
-              <a:buNone/>
-            </a:pPr>
-            <a:r>
-              <a:rPr lang="ko-KR" sz="1400" dirty="0">
-                <a:solidFill>
-                  <a:srgbClr val="6B7280"/>
-                </a:solidFill>
-                <a:latin typeface="Malgun Gothic" pitchFamily="34" charset="0"/>
-                <a:ea typeface="Malgun Gothic" pitchFamily="34" charset="-122"/>
-                <a:cs typeface="Malgun Gothic" pitchFamily="34" charset="-120"/>
-              </a:rPr>
-              <a:t>7위</a:t>
-            </a:r>
-            <a:endParaRPr lang="ko-KR" sz="1400" dirty="0"/>
-          </a:p>
-        </p:txBody>
-      </p:sp>
-      <p:sp>
-        <p:nvSpPr>
-          <p:cNvPr id="41" name="Text 39"/>
-          <p:cNvSpPr txBox="1"/>
-          <p:nvPr/>
-        </p:nvSpPr>
-        <p:spPr>
-          <a:xfrm>
-            <a:off x="4251960" y="2852928"/>
-            <a:ext cx="2286000" cy="292608"/>
-          </a:xfrm>
-          <a:prstGeom prst="rect">
-            <a:avLst/>
-          </a:prstGeom>
-          <a:noFill/>
-          <a:ln/>
-        </p:spPr>
-        <p:txBody>
-          <a:bodyPr wrap="square" lIns="0" tIns="0" rIns="0" bIns="0" rtlCol="0" anchor="ctr"/>
-          <a:lstStyle/>
-          <a:p>
-            <a:pPr eaLnBrk="0" indent="0" marL="0">
-              <a:buNone/>
-            </a:pPr>
-            <a:r>
-              <a:rPr lang="ko-KR" sz="1400" dirty="0">
-                <a:solidFill>
-                  <a:srgbClr val="6B7280"/>
-                </a:solidFill>
-                <a:latin typeface="Malgun Gothic" pitchFamily="34" charset="0"/>
-                <a:ea typeface="Malgun Gothic" pitchFamily="34" charset="-122"/>
-                <a:cs typeface="Malgun Gothic" pitchFamily="34" charset="-120"/>
-              </a:rPr>
-              <a:t>2위  </a:t>
-            </a:r>
-            <a:pPr eaLnBrk="0" indent="0" marL="0">
-              <a:buNone/>
-            </a:pPr>
-            <a:r>
-              <a:rPr lang="ko-KR" sz="1400" b="1" dirty="0">
-                <a:solidFill>
-                  <a:srgbClr val="1F8A5B"/>
-                </a:solidFill>
-                <a:latin typeface="Malgun Gothic" pitchFamily="34" charset="0"/>
-                <a:ea typeface="Malgun Gothic" pitchFamily="34" charset="-122"/>
-                <a:cs typeface="Malgun Gothic" pitchFamily="34" charset="-120"/>
-              </a:rPr>
-              <a:t>노원구 </a:t>
-            </a:r>
-            <a:pPr eaLnBrk="0" indent="0" marL="0">
-              <a:buNone/>
-            </a:pPr>
-            <a:r>
-              <a:rPr lang="ko-KR" sz="1200" dirty="0">
-                <a:solidFill>
-                  <a:srgbClr val="6B7280"/>
-                </a:solidFill>
-                <a:latin typeface="Malgun Gothic" pitchFamily="34" charset="0"/>
-                <a:ea typeface="Malgun Gothic" pitchFamily="34" charset="-122"/>
-                <a:cs typeface="Malgun Gothic" pitchFamily="34" charset="-120"/>
-              </a:rPr>
-              <a:t>18.80%</a:t>
-            </a:r>
-            <a:endParaRPr lang="ko-KR" sz="1400" dirty="0"/>
-          </a:p>
-        </p:txBody>
-      </p:sp>
-      <p:sp>
-        <p:nvSpPr>
-          <p:cNvPr id="42" name="Text 40"/>
-          <p:cNvSpPr txBox="1"/>
-          <p:nvPr/>
-        </p:nvSpPr>
-        <p:spPr>
-          <a:xfrm>
-            <a:off x="6812280" y="1691640"/>
-            <a:ext cx="2194560" cy="685800"/>
-          </a:xfrm>
-          <a:prstGeom prst="rect">
-            <a:avLst/>
-          </a:prstGeom>
-          <a:noFill/>
-          <a:ln/>
-        </p:spPr>
-        <p:txBody>
-          <a:bodyPr wrap="square" lIns="0" tIns="0" rIns="0" bIns="0" rtlCol="0" anchor="ctr"/>
-          <a:lstStyle/>
-          <a:p>
-            <a:pPr eaLnBrk="0" indent="0" marL="0">
-              <a:buNone/>
-            </a:pPr>
-            <a:r>
-              <a:rPr lang="ko-KR" sz="4000" b="1" dirty="0">
-                <a:solidFill>
-                  <a:srgbClr val="1D2430"/>
-                </a:solidFill>
-                <a:latin typeface="Malgun Gothic" pitchFamily="34" charset="0"/>
-                <a:ea typeface="Malgun Gothic" pitchFamily="34" charset="-122"/>
-                <a:cs typeface="Malgun Gothic" pitchFamily="34" charset="-120"/>
-              </a:rPr>
-              <a:t>21</a:t>
-            </a:r>
-            <a:pPr eaLnBrk="0" indent="0" marL="0">
-              <a:buNone/>
-            </a:pPr>
-            <a:r>
-              <a:rPr lang="ko-KR" sz="2200" dirty="0">
-                <a:solidFill>
-                  <a:srgbClr val="6B7280"/>
-                </a:solidFill>
-                <a:latin typeface="Malgun Gothic" pitchFamily="34" charset="0"/>
-                <a:ea typeface="Malgun Gothic" pitchFamily="34" charset="-122"/>
-                <a:cs typeface="Malgun Gothic" pitchFamily="34" charset="-120"/>
-              </a:rPr>
-              <a:t> / 25</a:t>
-            </a:r>
-            <a:endParaRPr lang="ko-KR" sz="1400" dirty="0"/>
-          </a:p>
-        </p:txBody>
-      </p:sp>
-      <p:sp>
-        <p:nvSpPr>
-          <p:cNvPr id="43" name="Text 41"/>
-          <p:cNvSpPr txBox="1"/>
-          <p:nvPr/>
-        </p:nvSpPr>
-        <p:spPr>
-          <a:xfrm>
-            <a:off x="6812280" y="2377440"/>
-            <a:ext cx="2286000" cy="548640"/>
-          </a:xfrm>
-          <a:prstGeom prst="rect">
-            <a:avLst/>
-          </a:prstGeom>
-          <a:noFill/>
-          <a:ln/>
-        </p:spPr>
-        <p:txBody>
-          <a:bodyPr wrap="square" lIns="0" tIns="0" rIns="0" bIns="0" rtlCol="0" anchor="t"/>
-          <a:lstStyle/>
-          <a:p>
-            <a:pPr eaLnBrk="0" indent="0" marL="0">
-              <a:buNone/>
-            </a:pPr>
-            <a:r>
-              <a:rPr lang="ko-KR" sz="1200" dirty="0">
-                <a:solidFill>
-                  <a:srgbClr val="5B6472"/>
-                </a:solidFill>
-                <a:latin typeface="Malgun Gothic" pitchFamily="34" charset="0"/>
-                <a:ea typeface="Malgun Gothic" pitchFamily="34" charset="-122"/>
-                <a:cs typeface="Malgun Gothic" pitchFamily="34" charset="-120"/>
-              </a:rPr>
-              <a:t>개 구의 비중 순위가 바뀌었다</a:t>
-            </a:r>
-            <a:endParaRPr lang="ko-KR" sz="1200" dirty="0"/>
-          </a:p>
-          <a:p>
-            <a:pPr eaLnBrk="0" indent="0" marL="0">
-              <a:buNone/>
-            </a:pPr>
-            <a:r>
-              <a:rPr lang="ko-KR" sz="1200" dirty="0">
-                <a:solidFill>
-                  <a:srgbClr val="5B6472"/>
-                </a:solidFill>
-                <a:latin typeface="Malgun Gothic" pitchFamily="34" charset="0"/>
-                <a:ea typeface="Malgun Gothic" pitchFamily="34" charset="-122"/>
-                <a:cs typeface="Malgun Gothic" pitchFamily="34" charset="-120"/>
-              </a:rPr>
-              <a:t>상위5 구성도 달라졌다</a:t>
-            </a:r>
-            <a:endParaRPr lang="ko-KR" sz="1200" dirty="0"/>
-          </a:p>
-        </p:txBody>
-      </p:sp>
-      <p:sp>
-        <p:nvSpPr>
-          <p:cNvPr id="44" name="Text 42"/>
-          <p:cNvSpPr txBox="1"/>
-          <p:nvPr/>
-        </p:nvSpPr>
-        <p:spPr>
-          <a:xfrm>
-            <a:off x="9326880" y="1691640"/>
-            <a:ext cx="2194560" cy="685800"/>
-          </a:xfrm>
-          <a:prstGeom prst="rect">
-            <a:avLst/>
-          </a:prstGeom>
-          <a:noFill/>
-          <a:ln/>
-        </p:spPr>
-        <p:txBody>
-          <a:bodyPr wrap="square" lIns="0" tIns="0" rIns="0" bIns="0" rtlCol="0" anchor="ctr"/>
-          <a:lstStyle/>
-          <a:p>
-            <a:pPr eaLnBrk="0" indent="0" marL="0">
-              <a:buNone/>
-            </a:pPr>
-            <a:r>
-              <a:rPr lang="ko-KR" sz="4000" b="1" dirty="0">
-                <a:solidFill>
-                  <a:srgbClr val="1D2430"/>
-                </a:solidFill>
-                <a:latin typeface="Malgun Gothic" pitchFamily="34" charset="0"/>
-                <a:ea typeface="Malgun Gothic" pitchFamily="34" charset="-122"/>
-                <a:cs typeface="Malgun Gothic" pitchFamily="34" charset="-120"/>
-              </a:rPr>
-              <a:t>0</a:t>
-            </a:r>
-            <a:endParaRPr lang="ko-KR" sz="1400" dirty="0"/>
-          </a:p>
-        </p:txBody>
-      </p:sp>
-      <p:sp>
-        <p:nvSpPr>
-          <p:cNvPr id="45" name="Text 43"/>
-          <p:cNvSpPr txBox="1"/>
-          <p:nvPr/>
-        </p:nvSpPr>
-        <p:spPr>
-          <a:xfrm>
-            <a:off x="9326880" y="2377440"/>
-            <a:ext cx="2286000" cy="548640"/>
-          </a:xfrm>
-          <a:prstGeom prst="rect">
-            <a:avLst/>
-          </a:prstGeom>
-          <a:noFill/>
-          <a:ln/>
-        </p:spPr>
-        <p:txBody>
-          <a:bodyPr wrap="square" lIns="0" tIns="0" rIns="0" bIns="0" rtlCol="0" anchor="t"/>
-          <a:lstStyle/>
-          <a:p>
-            <a:pPr eaLnBrk="0" indent="0" marL="0">
-              <a:buNone/>
-            </a:pPr>
-            <a:r>
-              <a:rPr lang="ko-KR" sz="1200" dirty="0">
-                <a:solidFill>
-                  <a:srgbClr val="5B6472"/>
-                </a:solidFill>
-                <a:latin typeface="Malgun Gothic" pitchFamily="34" charset="0"/>
-                <a:ea typeface="Malgun Gothic" pitchFamily="34" charset="-122"/>
-                <a:cs typeface="Malgun Gothic" pitchFamily="34" charset="-120"/>
-              </a:rPr>
-              <a:t>절대(10대 합계) 순위 변화</a:t>
-            </a:r>
-            <a:endParaRPr lang="ko-KR" sz="1200" dirty="0"/>
-          </a:p>
-          <a:p>
-            <a:pPr eaLnBrk="0" indent="0" marL="0">
-              <a:buNone/>
-            </a:pPr>
-            <a:r>
-              <a:rPr lang="ko-KR" sz="1200" dirty="0">
-                <a:solidFill>
-                  <a:srgbClr val="5B6472"/>
-                </a:solidFill>
-                <a:latin typeface="Malgun Gothic" pitchFamily="34" charset="0"/>
-                <a:ea typeface="Malgun Gothic" pitchFamily="34" charset="-122"/>
-                <a:cs typeface="Malgun Gothic" pitchFamily="34" charset="-120"/>
-              </a:rPr>
-              <a:t>10대는 범위 안 결측이 0건</a:t>
-            </a:r>
-            <a:endParaRPr lang="ko-KR" sz="1200" dirty="0"/>
-          </a:p>
-        </p:txBody>
-      </p:sp>
-      <p:sp>
-        <p:nvSpPr>
-          <p:cNvPr id="46" name="Text 44"/>
-          <p:cNvSpPr txBox="1"/>
-          <p:nvPr/>
-        </p:nvSpPr>
-        <p:spPr>
-          <a:xfrm>
-            <a:off x="6812280" y="3127248"/>
-            <a:ext cx="777240" cy="274320"/>
+          <p:cNvPr id="3" name="live-link"/>
+          <p:cNvSpPr txBox="1"/>
+          <p:nvPr/>
+        </p:nvSpPr>
+        <p:spPr>
+          <a:xfrm>
+            <a:off x="6720840" y="292608"/>
+            <a:ext cx="2514600" cy="329184"/>
           </a:xfrm>
           <a:prstGeom prst="roundRect">
             <a:avLst>
@@ -14766,7 +13163,11 @@
           <a:solidFill>
             <a:srgbClr val="DDF3E8"/>
           </a:solidFill>
-          <a:ln/>
+          <a:ln w="12700">
+            <a:solidFill>
+              <a:srgbClr val="1F8A5B"/>
+            </a:solidFill>
+          </a:ln>
         </p:spPr>
         <p:txBody>
           <a:bodyPr wrap="square" lIns="0" tIns="0" rIns="0" bIns="0" rtlCol="0" anchor="ctr"/>
@@ -14776,237 +13177,65 @@
               <a:buNone/>
             </a:pPr>
             <a:r>
-              <a:rPr lang="ko-KR" sz="1200" b="1" dirty="0">
+              <a:rPr lang="ko-KR" sz="1200" b="1" u="sng" dirty="0">
                 <a:solidFill>
                   <a:srgbClr val="1F8A5B"/>
                 </a:solidFill>
                 <a:latin typeface="Malgun Gothic" pitchFamily="34" charset="0"/>
                 <a:ea typeface="Malgun Gothic" pitchFamily="34" charset="-122"/>
                 <a:cs typeface="Malgun Gothic" pitchFamily="34" charset="-120"/>
-              </a:rPr>
-              <a:t>왜</a:t>
+                <a:hlinkClick r:id="rId1" invalidUrl="" action="" tgtFrame="" tooltip="마우스 오버·클릭·분모 보정 전환이 되는 차트 열기" history="1" highlightClick="0" endSnd="0">
+                  <a:extLst>
+                    <a:ext uri="{A12FA001-AC4F-418D-AE19-62706E023703}">
+                      <ahyp:hlinkClr xmlns:ahyp="http://schemas.microsoft.com/office/drawing/2018/hyperlinkcolor" val="tx"/>
+                    </a:ext>
+                  </a:extLst>
+                </a:hlinkClick>
+              </a:rPr>
+              <a:t>▶ 직접 해보기 · 상호작용 차트</a:t>
             </a:r>
             <a:endParaRPr lang="ko-KR" sz="1200" dirty="0"/>
           </a:p>
         </p:txBody>
       </p:sp>
-      <p:sp>
-        <p:nvSpPr>
-          <p:cNvPr id="47" name="Text 45"/>
-          <p:cNvSpPr txBox="1"/>
-          <p:nvPr/>
-        </p:nvSpPr>
-        <p:spPr>
-          <a:xfrm>
-            <a:off x="7726680" y="3108960"/>
-            <a:ext cx="3913632" cy="640080"/>
-          </a:xfrm>
-          <a:prstGeom prst="rect">
-            <a:avLst/>
-          </a:prstGeom>
-          <a:noFill/>
-          <a:ln/>
-        </p:spPr>
-        <p:txBody>
-          <a:bodyPr wrap="square" lIns="0" tIns="0" rIns="0" bIns="0" rtlCol="0" anchor="t"/>
-          <a:lstStyle/>
-          <a:p>
-            <a:pPr eaLnBrk="0" indent="0" marL="0">
-              <a:buNone/>
-            </a:pPr>
-            <a:r>
-              <a:rPr lang="ko-KR" sz="1400" dirty="0">
-                <a:solidFill>
-                  <a:srgbClr val="1D2430"/>
-                </a:solidFill>
-                <a:latin typeface="Malgun Gothic" pitchFamily="34" charset="0"/>
-                <a:ea typeface="Malgun Gothic" pitchFamily="34" charset="-122"/>
-                <a:cs typeface="Malgun Gothic" pitchFamily="34" charset="-120"/>
-              </a:rPr>
-              <a:t>결측 칸이 합계에서 빠지면 그 구의 분모가 작아져 비중이 부풀려진다. 17개 구가 해당됐다.</a:t>
-            </a:r>
-            <a:endParaRPr lang="ko-KR" sz="1400" dirty="0"/>
-          </a:p>
-        </p:txBody>
-      </p:sp>
-      <p:sp>
-        <p:nvSpPr>
-          <p:cNvPr id="48" name="Text 46"/>
-          <p:cNvSpPr txBox="1"/>
-          <p:nvPr/>
-        </p:nvSpPr>
-        <p:spPr>
-          <a:xfrm>
-            <a:off x="6812280" y="3840480"/>
-            <a:ext cx="777240" cy="274320"/>
+      <p:pic>
+        <p:nvPicPr>
+          <p:cNvPr id="4" name="Image 0" descr="분모 결측 보정 전후 25개 자치구 비중 순위 이동. 성북구 1위에서 6위, 노원구 7위에서 2위, 21/25개 구 순위 변동">    </p:cNvPr>
+          <p:cNvPicPr>
+            <a:picLocks noChangeAspect="1"/>
+          </p:cNvPicPr>
+          <p:nvPr/>
+        </p:nvPicPr>
+        <p:blipFill>
+          <a:blip r:embed="rId2"/>
+          <a:stretch>
+            <a:fillRect/>
+          </a:stretch>
+        </p:blipFill>
+        <p:spPr>
+          <a:xfrm>
+            <a:off x="1249528" y="1691640"/>
+            <a:ext cx="9692640" cy="4067447"/>
+          </a:xfrm>
+          <a:prstGeom prst="rect">
+            <a:avLst/>
+          </a:prstGeom>
+        </p:spPr>
+      </p:pic>
+      <p:sp>
+        <p:nvSpPr>
+          <p:cNvPr id="5" name="Text 2"/>
+          <p:cNvSpPr txBox="1"/>
+          <p:nvPr/>
+        </p:nvSpPr>
+        <p:spPr>
+          <a:xfrm>
+            <a:off x="548640" y="5850527"/>
+            <a:ext cx="11091672" cy="420624"/>
           </a:xfrm>
           <a:prstGeom prst="roundRect">
             <a:avLst>
-              <a:gd name="adj" fmla="val 50000"/>
-            </a:avLst>
-          </a:prstGeom>
-          <a:solidFill>
-            <a:srgbClr val="DDF3E8"/>
-          </a:solidFill>
-          <a:ln/>
-        </p:spPr>
-        <p:txBody>
-          <a:bodyPr wrap="square" lIns="0" tIns="0" rIns="0" bIns="0" rtlCol="0" anchor="ctr"/>
-          <a:lstStyle/>
-          <a:p>
-            <a:pPr eaLnBrk="0" algn="ctr" indent="0" marL="0">
-              <a:buNone/>
-            </a:pPr>
-            <a:r>
-              <a:rPr lang="ko-KR" sz="1200" b="1" dirty="0">
-                <a:solidFill>
-                  <a:srgbClr val="1F8A5B"/>
-                </a:solidFill>
-                <a:latin typeface="Malgun Gothic" pitchFamily="34" charset="0"/>
-                <a:ea typeface="Malgun Gothic" pitchFamily="34" charset="-122"/>
-                <a:cs typeface="Malgun Gothic" pitchFamily="34" charset="-120"/>
-              </a:rPr>
-              <a:t>어떻게</a:t>
-            </a:r>
-            <a:endParaRPr lang="ko-KR" sz="1200" dirty="0"/>
-          </a:p>
-        </p:txBody>
-      </p:sp>
-      <p:sp>
-        <p:nvSpPr>
-          <p:cNvPr id="49" name="Text 47"/>
-          <p:cNvSpPr txBox="1"/>
-          <p:nvPr/>
-        </p:nvSpPr>
-        <p:spPr>
-          <a:xfrm>
-            <a:off x="7726680" y="3822192"/>
-            <a:ext cx="3913632" cy="640080"/>
-          </a:xfrm>
-          <a:prstGeom prst="rect">
-            <a:avLst/>
-          </a:prstGeom>
-          <a:noFill/>
-          <a:ln/>
-        </p:spPr>
-        <p:txBody>
-          <a:bodyPr wrap="square" lIns="0" tIns="0" rIns="0" bIns="0" rtlCol="0" anchor="t"/>
-          <a:lstStyle/>
-          <a:p>
-            <a:pPr eaLnBrk="0" indent="0" marL="0">
-              <a:buNone/>
-            </a:pPr>
-            <a:r>
-              <a:rPr lang="ko-KR" sz="1400" dirty="0">
-                <a:solidFill>
-                  <a:srgbClr val="1D2430"/>
-                </a:solidFill>
-                <a:latin typeface="Malgun Gothic" pitchFamily="34" charset="0"/>
-                <a:ea typeface="Malgun Gothic" pitchFamily="34" charset="-122"/>
-                <a:cs typeface="Malgun Gothic" pitchFamily="34" charset="-120"/>
-              </a:rPr>
-              <a:t>같은 구·같은 연령대의 15~17시 다른 시간대 평균으로 채웠다.</a:t>
-            </a:r>
-            <a:endParaRPr lang="ko-KR" sz="1400" dirty="0"/>
-          </a:p>
-        </p:txBody>
-      </p:sp>
-      <p:sp>
-        <p:nvSpPr>
-          <p:cNvPr id="50" name="Text 48"/>
-          <p:cNvSpPr txBox="1"/>
-          <p:nvPr/>
-        </p:nvSpPr>
-        <p:spPr>
-          <a:xfrm>
-            <a:off x="6812280" y="4553712"/>
-            <a:ext cx="777240" cy="274320"/>
-          </a:xfrm>
-          <a:prstGeom prst="roundRect">
-            <a:avLst>
-              <a:gd name="adj" fmla="val 50000"/>
-            </a:avLst>
-          </a:prstGeom>
-          <a:solidFill>
-            <a:srgbClr val="DDF3E8"/>
-          </a:solidFill>
-          <a:ln/>
-        </p:spPr>
-        <p:txBody>
-          <a:bodyPr wrap="square" lIns="0" tIns="0" rIns="0" bIns="0" rtlCol="0" anchor="ctr"/>
-          <a:lstStyle/>
-          <a:p>
-            <a:pPr eaLnBrk="0" algn="ctr" indent="0" marL="0">
-              <a:buNone/>
-            </a:pPr>
-            <a:r>
-              <a:rPr lang="ko-KR" sz="1200" b="1" dirty="0">
-                <a:solidFill>
-                  <a:srgbClr val="1F8A5B"/>
-                </a:solidFill>
-                <a:latin typeface="Malgun Gothic" pitchFamily="34" charset="0"/>
-                <a:ea typeface="Malgun Gothic" pitchFamily="34" charset="-122"/>
-                <a:cs typeface="Malgun Gothic" pitchFamily="34" charset="-120"/>
-              </a:rPr>
-              <a:t>읽는 법</a:t>
-            </a:r>
-            <a:endParaRPr lang="ko-KR" sz="1200" dirty="0"/>
-          </a:p>
-        </p:txBody>
-      </p:sp>
-      <p:sp>
-        <p:nvSpPr>
-          <p:cNvPr id="51" name="Text 49"/>
-          <p:cNvSpPr txBox="1"/>
-          <p:nvPr/>
-        </p:nvSpPr>
-        <p:spPr>
-          <a:xfrm>
-            <a:off x="7726680" y="4535424"/>
-            <a:ext cx="3913632" cy="1097280"/>
-          </a:xfrm>
-          <a:prstGeom prst="rect">
-            <a:avLst/>
-          </a:prstGeom>
-          <a:noFill/>
-          <a:ln/>
-        </p:spPr>
-        <p:txBody>
-          <a:bodyPr wrap="square" lIns="0" tIns="0" rIns="0" bIns="0" rtlCol="0" anchor="t"/>
-          <a:lstStyle/>
-          <a:p>
-            <a:pPr eaLnBrk="0" indent="0" marL="0">
-              <a:buNone/>
-            </a:pPr>
-            <a:r>
-              <a:rPr lang="ko-KR" sz="1400" dirty="0">
-                <a:solidFill>
-                  <a:srgbClr val="1D2430"/>
-                </a:solidFill>
-                <a:latin typeface="Malgun Gothic" pitchFamily="34" charset="0"/>
-                <a:ea typeface="Malgun Gothic" pitchFamily="34" charset="-122"/>
-                <a:cs typeface="Malgun Gothic" pitchFamily="34" charset="-120"/>
-              </a:rPr>
-              <a:t>보정은 분모만 키운다. 성북구 1→6위는 부풀었던 비중이 내려온 것이고, 노원구 7→2위는 결측이 없어 비중(18.80%)이 그대로인데 다른 구가 내려오며 올라선 것이다.</a:t>
-            </a:r>
-            <a:endParaRPr lang="ko-KR" sz="1400" dirty="0"/>
-          </a:p>
-        </p:txBody>
-      </p:sp>
-      <p:sp>
-        <p:nvSpPr>
-          <p:cNvPr id="52" name="Text 50"/>
-          <p:cNvSpPr txBox="1"/>
-          <p:nvPr/>
-        </p:nvSpPr>
-        <p:spPr>
-          <a:xfrm>
-            <a:off x="6812280" y="5760720"/>
-            <a:ext cx="4828032" cy="502920"/>
-          </a:xfrm>
-          <a:prstGeom prst="roundRect">
-            <a:avLst>
-              <a:gd name="adj" fmla="val 18182"/>
+              <a:gd name="adj" fmla="val 21739"/>
             </a:avLst>
           </a:prstGeom>
           <a:solidFill>
@@ -15030,7 +13259,21 @@
                 <a:ea typeface="Malgun Gothic" pitchFamily="34" charset="-122"/>
                 <a:cs typeface="Malgun Gothic" pitchFamily="34" charset="-120"/>
               </a:rPr>
-              <a:t>순위가 흔들리는 걸 보고도 보정했다 → 결론은 '이번 정제 기준의 결과'로 읽는다 (한계 ③)</a:t>
+              <a:t>읽는 법   </a:t>
+            </a:r>
+            <a:pPr eaLnBrk="0" indent="0" marL="0">
+              <a:buNone/>
+            </a:pPr>
+            <a:r>
+              <a:rPr lang="ko-KR" sz="1200" dirty="0">
+                <a:solidFill>
+                  <a:srgbClr val="1D2430"/>
+                </a:solidFill>
+                <a:latin typeface="Malgun Gothic" pitchFamily="34" charset="0"/>
+                <a:ea typeface="Malgun Gothic" pitchFamily="34" charset="-122"/>
+                <a:cs typeface="Malgun Gothic" pitchFamily="34" charset="-120"/>
+              </a:rPr>
+              <a:t>보정은 분모만 키운다 → 결측이 있던 구는 내려오고, 없던 구(노원 등)는 그대로라 올라선다. 순위가 이렇게 흔들리는 걸 보고도 보정했으므로 결론은 '이번 정제 기준의 결과'(한계 ③)</a:t>
             </a:r>
             <a:endParaRPr lang="ko-KR" sz="1200" dirty="0"/>
           </a:p>
@@ -15152,228 +13395,196 @@
       </p:sp>
       <p:sp>
         <p:nvSpPr>
-          <p:cNvPr id="3" name="Text 1"/>
-          <p:cNvSpPr txBox="1"/>
-          <p:nvPr/>
-        </p:nvSpPr>
-        <p:spPr>
-          <a:xfrm>
-            <a:off x="548640" y="1719072"/>
-            <a:ext cx="5394960" cy="320040"/>
-          </a:xfrm>
-          <a:prstGeom prst="rect">
-            <a:avLst/>
-          </a:prstGeom>
-          <a:noFill/>
-          <a:ln/>
-        </p:spPr>
-        <p:txBody>
-          <a:bodyPr wrap="square" lIns="0" tIns="0" rIns="0" bIns="0" rtlCol="0" anchor="t"/>
-          <a:lstStyle/>
-          <a:p>
-            <a:pPr eaLnBrk="0" indent="0" marL="0">
-              <a:buNone/>
-            </a:pPr>
-            <a:r>
-              <a:rPr lang="ko-KR" sz="1400" b="1" dirty="0">
-                <a:solidFill>
-                  <a:srgbClr val="1D2430"/>
-                </a:solidFill>
-                <a:latin typeface="Malgun Gothic" pitchFamily="34" charset="0"/>
-                <a:ea typeface="Malgun Gothic" pitchFamily="34" charset="-122"/>
-                <a:cs typeface="Malgun Gothic" pitchFamily="34" charset="-120"/>
-              </a:rPr>
-              <a:t>절대 상위5 · 10대 합계(명)</a:t>
-            </a:r>
-            <a:endParaRPr lang="ko-KR" sz="1400" dirty="0"/>
-          </a:p>
-        </p:txBody>
-      </p:sp>
-      <p:graphicFrame>
-        <p:nvGraphicFramePr>
-          <p:cNvPr id="4" name="chart-0" descr="절대 상위5 · 10대 합계(명)"/>
-          <p:cNvGraphicFramePr/>
-          <p:nvPr/>
-        </p:nvGraphicFramePr>
-        <p:xfrm>
-          <a:off x="548640" y="2057400"/>
-          <a:ext cx="5394960" cy="2697480"/>
-        </p:xfrm>
-        <a:graphic xmlns:a="http://schemas.openxmlformats.org/drawingml/2006/main">
-          <a:graphicData uri="http://schemas.openxmlformats.org/drawingml/2006/chart">
-            <c:chart xmlns:c="http://schemas.openxmlformats.org/drawingml/2006/chart" r:id="rId1"/>
-          </a:graphicData>
-        </a:graphic>
-      </p:graphicFrame>
-      <p:sp>
-        <p:nvSpPr>
-          <p:cNvPr id="5" name="Text 2"/>
-          <p:cNvSpPr txBox="1"/>
-          <p:nvPr/>
-        </p:nvSpPr>
-        <p:spPr>
-          <a:xfrm>
-            <a:off x="6245352" y="1719072"/>
-            <a:ext cx="5394960" cy="320040"/>
-          </a:xfrm>
-          <a:prstGeom prst="rect">
-            <a:avLst/>
-          </a:prstGeom>
-          <a:noFill/>
-          <a:ln/>
-        </p:spPr>
-        <p:txBody>
-          <a:bodyPr wrap="square" lIns="0" tIns="0" rIns="0" bIns="0" rtlCol="0" anchor="t"/>
-          <a:lstStyle/>
-          <a:p>
-            <a:pPr eaLnBrk="0" indent="0" marL="0">
-              <a:buNone/>
-            </a:pPr>
-            <a:r>
-              <a:rPr lang="ko-KR" sz="1400" b="1" dirty="0">
-                <a:solidFill>
-                  <a:srgbClr val="1D2430"/>
-                </a:solidFill>
-                <a:latin typeface="Malgun Gothic" pitchFamily="34" charset="0"/>
-                <a:ea typeface="Malgun Gothic" pitchFamily="34" charset="-122"/>
-                <a:cs typeface="Malgun Gothic" pitchFamily="34" charset="-120"/>
-              </a:rPr>
-              <a:t>비중 상위5 · 전 연령 대비 10대(%)</a:t>
-            </a:r>
-            <a:endParaRPr lang="ko-KR" sz="1400" dirty="0"/>
-          </a:p>
-        </p:txBody>
-      </p:sp>
-      <p:graphicFrame>
-        <p:nvGraphicFramePr>
-          <p:cNvPr id="6" name="chart-1" descr="비중 상위5 · 전 연령 대비 10대(%)"/>
-          <p:cNvGraphicFramePr/>
-          <p:nvPr/>
-        </p:nvGraphicFramePr>
-        <p:xfrm>
-          <a:off x="6245352" y="2057400"/>
-          <a:ext cx="5394960" cy="2697480"/>
-        </p:xfrm>
-        <a:graphic xmlns:a="http://schemas.openxmlformats.org/drawingml/2006/main">
-          <a:graphicData uri="http://schemas.openxmlformats.org/drawingml/2006/chart">
-            <c:chart xmlns:c="http://schemas.openxmlformats.org/drawingml/2006/chart" r:id="rId2"/>
-          </a:graphicData>
-        </a:graphic>
-      </p:graphicFrame>
-      <p:sp>
-        <p:nvSpPr>
-          <p:cNvPr id="7" name="verdict-0"/>
-          <p:cNvSpPr/>
-          <p:nvPr/>
-        </p:nvSpPr>
-        <p:spPr>
-          <a:xfrm>
-            <a:off x="548640" y="4937760"/>
-            <a:ext cx="3575304" cy="1325880"/>
+          <p:cNvPr id="3" name="live-link"/>
+          <p:cNvSpPr txBox="1"/>
+          <p:nvPr/>
+        </p:nvSpPr>
+        <p:spPr>
+          <a:xfrm>
+            <a:off x="6720840" y="292608"/>
+            <a:ext cx="2514600" cy="329184"/>
           </a:xfrm>
           <a:prstGeom prst="roundRect">
             <a:avLst>
-              <a:gd name="adj" fmla="val 8276"/>
+              <a:gd name="adj" fmla="val 50000"/>
             </a:avLst>
           </a:prstGeom>
           <a:solidFill>
             <a:srgbClr val="DDF3E8"/>
           </a:solidFill>
-          <a:ln/>
-        </p:spPr>
-      </p:sp>
-      <p:sp>
-        <p:nvSpPr>
-          <p:cNvPr id="8" name="Text 4"/>
-          <p:cNvSpPr txBox="1"/>
-          <p:nvPr/>
-        </p:nvSpPr>
-        <p:spPr>
-          <a:xfrm>
-            <a:off x="777240" y="5047488"/>
-            <a:ext cx="1828800" cy="292608"/>
-          </a:xfrm>
-          <a:prstGeom prst="rect">
-            <a:avLst/>
-          </a:prstGeom>
-          <a:noFill/>
-          <a:ln/>
-        </p:spPr>
-        <p:txBody>
-          <a:bodyPr wrap="square" lIns="0" tIns="0" rIns="0" bIns="0" rtlCol="0" anchor="t"/>
-          <a:lstStyle/>
-          <a:p>
-            <a:pPr eaLnBrk="0" indent="0" marL="0">
-              <a:buNone/>
-            </a:pPr>
-            <a:r>
-              <a:rPr lang="ko-KR" sz="1400" b="1" dirty="0">
+          <a:ln w="12700">
+            <a:solidFill>
+              <a:srgbClr val="1F8A5B"/>
+            </a:solidFill>
+          </a:ln>
+        </p:spPr>
+        <p:txBody>
+          <a:bodyPr wrap="square" lIns="0" tIns="0" rIns="0" bIns="0" rtlCol="0" anchor="ctr"/>
+          <a:lstStyle/>
+          <a:p>
+            <a:pPr eaLnBrk="0" algn="ctr" indent="0" marL="0">
+              <a:buNone/>
+            </a:pPr>
+            <a:r>
+              <a:rPr lang="ko-KR" sz="1200" b="1" u="sng" dirty="0">
                 <a:solidFill>
                   <a:srgbClr val="1F8A5B"/>
                 </a:solidFill>
                 <a:latin typeface="Malgun Gothic" pitchFamily="34" charset="0"/>
                 <a:ea typeface="Malgun Gothic" pitchFamily="34" charset="-122"/>
                 <a:cs typeface="Malgun Gothic" pitchFamily="34" charset="-120"/>
-              </a:rPr>
-              <a:t>적중</a:t>
-            </a:r>
-            <a:endParaRPr lang="ko-KR" sz="1400" dirty="0"/>
-          </a:p>
-        </p:txBody>
-      </p:sp>
-      <p:sp>
-        <p:nvSpPr>
-          <p:cNvPr id="9" name="Text 5"/>
-          <p:cNvSpPr txBox="1"/>
-          <p:nvPr/>
-        </p:nvSpPr>
-        <p:spPr>
-          <a:xfrm>
-            <a:off x="777240" y="5376672"/>
-            <a:ext cx="3118104" cy="822960"/>
-          </a:xfrm>
-          <a:prstGeom prst="rect">
-            <a:avLst/>
-          </a:prstGeom>
-          <a:noFill/>
-          <a:ln/>
-        </p:spPr>
-        <p:txBody>
-          <a:bodyPr wrap="square" lIns="0" tIns="0" rIns="0" bIns="0" rtlCol="0" anchor="t"/>
-          <a:lstStyle/>
-          <a:p>
-            <a:pPr eaLnBrk="0" indent="0" marL="0">
-              <a:buNone/>
-            </a:pPr>
-            <a:r>
-              <a:rPr lang="ko-KR" sz="1300" dirty="0">
-                <a:solidFill>
-                  <a:srgbClr val="1D2430"/>
-                </a:solidFill>
-                <a:latin typeface="Malgun Gothic" pitchFamily="34" charset="0"/>
-                <a:ea typeface="Malgun Gothic" pitchFamily="34" charset="-122"/>
-                <a:cs typeface="Malgun Gothic" pitchFamily="34" charset="-120"/>
-              </a:rPr>
-              <a:t>강남 절대 1위 · 노원 비중 2위. 번화한 학원가는 비중이 낮다(강남 19위, 송파 17위).</a:t>
-            </a:r>
-            <a:endParaRPr lang="ko-KR" sz="1300" dirty="0"/>
-          </a:p>
-        </p:txBody>
-      </p:sp>
-      <p:sp>
-        <p:nvSpPr>
-          <p:cNvPr id="10" name="verdict-1"/>
+                <a:hlinkClick r:id="rId1" invalidUrl="" action="" tgtFrame="" tooltip="마우스 오버·클릭·분모 보정 전환이 되는 차트 열기" history="1" highlightClick="0" endSnd="0">
+                  <a:extLst>
+                    <a:ext uri="{A12FA001-AC4F-418D-AE19-62706E023703}">
+                      <ahyp:hlinkClr xmlns:ahyp="http://schemas.microsoft.com/office/drawing/2018/hyperlinkcolor" val="tx"/>
+                    </a:ext>
+                  </a:extLst>
+                </a:hlinkClick>
+              </a:rPr>
+              <a:t>▶ 직접 해보기 · 상호작용 차트</a:t>
+            </a:r>
+            <a:endParaRPr lang="ko-KR" sz="1200" dirty="0"/>
+          </a:p>
+        </p:txBody>
+      </p:sp>
+      <p:pic>
+        <p:nvPicPr>
+          <p:cNvPr id="4" name="Image 0" descr="절대(10대 합계)와 비중(10대 비율) 사분면. 노원구와 영등포구만 두 지표 모두 상위5">    </p:cNvPr>
+          <p:cNvPicPr>
+            <a:picLocks noChangeAspect="1"/>
+          </p:cNvPicPr>
+          <p:nvPr/>
+        </p:nvPicPr>
+        <p:blipFill>
+          <a:blip r:embed="rId2"/>
+          <a:stretch>
+            <a:fillRect/>
+          </a:stretch>
+        </p:blipFill>
+        <p:spPr>
+          <a:xfrm>
+            <a:off x="548640" y="1691640"/>
+            <a:ext cx="7223760" cy="4580921"/>
+          </a:xfrm>
+          <a:prstGeom prst="rect">
+            <a:avLst/>
+          </a:prstGeom>
+        </p:spPr>
+      </p:pic>
+      <p:sp>
+        <p:nvSpPr>
+          <p:cNvPr id="5" name="verdict-0"/>
           <p:cNvSpPr/>
           <p:nvPr/>
         </p:nvSpPr>
         <p:spPr>
           <a:xfrm>
-            <a:off x="4306824" y="4937760"/>
-            <a:ext cx="3575304" cy="1325880"/>
+            <a:off x="8001000" y="1691640"/>
+            <a:ext cx="3639312" cy="1423342"/>
           </a:xfrm>
           <a:prstGeom prst="roundRect">
             <a:avLst>
-              <a:gd name="adj" fmla="val 8276"/>
+              <a:gd name="adj" fmla="val 7709"/>
+            </a:avLst>
+          </a:prstGeom>
+          <a:solidFill>
+            <a:srgbClr val="DDF3E8"/>
+          </a:solidFill>
+          <a:ln/>
+        </p:spPr>
+      </p:sp>
+      <p:sp>
+        <p:nvSpPr>
+          <p:cNvPr id="6" name="Text 3"/>
+          <p:cNvSpPr txBox="1"/>
+          <p:nvPr/>
+        </p:nvSpPr>
+        <p:spPr>
+          <a:xfrm>
+            <a:off x="8229600" y="1828800"/>
+            <a:ext cx="1828800" cy="292608"/>
+          </a:xfrm>
+          <a:prstGeom prst="rect">
+            <a:avLst/>
+          </a:prstGeom>
+          <a:noFill/>
+          <a:ln/>
+        </p:spPr>
+        <p:txBody>
+          <a:bodyPr wrap="square" lIns="0" tIns="0" rIns="0" bIns="0" rtlCol="0" anchor="t"/>
+          <a:lstStyle/>
+          <a:p>
+            <a:pPr eaLnBrk="0" indent="0" marL="0">
+              <a:buNone/>
+            </a:pPr>
+            <a:r>
+              <a:rPr lang="ko-KR" sz="1500" b="1" dirty="0">
+                <a:solidFill>
+                  <a:srgbClr val="1F8A5B"/>
+                </a:solidFill>
+                <a:latin typeface="Malgun Gothic" pitchFamily="34" charset="0"/>
+                <a:ea typeface="Malgun Gothic" pitchFamily="34" charset="-122"/>
+                <a:cs typeface="Malgun Gothic" pitchFamily="34" charset="-120"/>
+              </a:rPr>
+              <a:t>적중</a:t>
+            </a:r>
+            <a:endParaRPr lang="ko-KR" sz="1500" dirty="0"/>
+          </a:p>
+        </p:txBody>
+      </p:sp>
+      <p:sp>
+        <p:nvSpPr>
+          <p:cNvPr id="7" name="Text 4"/>
+          <p:cNvSpPr txBox="1"/>
+          <p:nvPr/>
+        </p:nvSpPr>
+        <p:spPr>
+          <a:xfrm>
+            <a:off x="8229600" y="2194560"/>
+            <a:ext cx="3182112" cy="828982"/>
+          </a:xfrm>
+          <a:prstGeom prst="rect">
+            <a:avLst/>
+          </a:prstGeom>
+          <a:noFill/>
+          <a:ln/>
+        </p:spPr>
+        <p:txBody>
+          <a:bodyPr wrap="square" lIns="0" tIns="0" rIns="0" bIns="0" rtlCol="0" anchor="t"/>
+          <a:lstStyle/>
+          <a:p>
+            <a:pPr eaLnBrk="0" indent="0" marL="0">
+              <a:buNone/>
+            </a:pPr>
+            <a:r>
+              <a:rPr lang="ko-KR" sz="1300" dirty="0">
+                <a:solidFill>
+                  <a:srgbClr val="1D2430"/>
+                </a:solidFill>
+                <a:latin typeface="Malgun Gothic" pitchFamily="34" charset="0"/>
+                <a:ea typeface="Malgun Gothic" pitchFamily="34" charset="-122"/>
+                <a:cs typeface="Malgun Gothic" pitchFamily="34" charset="-120"/>
+              </a:rPr>
+              <a:t>강남 절대 1위 · 노원 비중 2위. 번화한 학원가는 비중이 낮다(강남 19위, 송파 17위).</a:t>
+            </a:r>
+            <a:endParaRPr lang="ko-KR" sz="1300" dirty="0"/>
+          </a:p>
+        </p:txBody>
+      </p:sp>
+      <p:sp>
+        <p:nvSpPr>
+          <p:cNvPr id="8" name="verdict-1"/>
+          <p:cNvSpPr/>
+          <p:nvPr/>
+        </p:nvSpPr>
+        <p:spPr>
+          <a:xfrm>
+            <a:off x="8001000" y="3270430"/>
+            <a:ext cx="3639312" cy="1423342"/>
+          </a:xfrm>
+          <a:prstGeom prst="roundRect">
+            <a:avLst>
+              <a:gd name="adj" fmla="val 7709"/>
             </a:avLst>
           </a:prstGeom>
           <a:solidFill>
@@ -15384,13 +13595,13 @@
       </p:sp>
       <p:sp>
         <p:nvSpPr>
-          <p:cNvPr id="11" name="Text 7"/>
-          <p:cNvSpPr txBox="1"/>
-          <p:nvPr/>
-        </p:nvSpPr>
-        <p:spPr>
-          <a:xfrm>
-            <a:off x="4535424" y="5047488"/>
+          <p:cNvPr id="9" name="Text 6"/>
+          <p:cNvSpPr txBox="1"/>
+          <p:nvPr/>
+        </p:nvSpPr>
+        <p:spPr>
+          <a:xfrm>
+            <a:off x="8229600" y="3407590"/>
             <a:ext cx="1828800" cy="292608"/>
           </a:xfrm>
           <a:prstGeom prst="rect">
@@ -15407,7 +13618,7 @@
               <a:buNone/>
             </a:pPr>
             <a:r>
-              <a:rPr lang="ko-KR" sz="1400" b="1" dirty="0">
+              <a:rPr lang="ko-KR" sz="1500" b="1" dirty="0">
                 <a:solidFill>
                   <a:srgbClr val="C2412D"/>
                 </a:solidFill>
@@ -15417,20 +13628,20 @@
               </a:rPr>
               <a:t>빗나감</a:t>
             </a:r>
-            <a:endParaRPr lang="ko-KR" sz="1400" dirty="0"/>
-          </a:p>
-        </p:txBody>
-      </p:sp>
-      <p:sp>
-        <p:nvSpPr>
-          <p:cNvPr id="12" name="Text 8"/>
-          <p:cNvSpPr txBox="1"/>
-          <p:nvPr/>
-        </p:nvSpPr>
-        <p:spPr>
-          <a:xfrm>
-            <a:off x="4535424" y="5376672"/>
-            <a:ext cx="3118104" cy="822960"/>
+            <a:endParaRPr lang="ko-KR" sz="1500" dirty="0"/>
+          </a:p>
+        </p:txBody>
+      </p:sp>
+      <p:sp>
+        <p:nvSpPr>
+          <p:cNvPr id="10" name="Text 7"/>
+          <p:cNvSpPr txBox="1"/>
+          <p:nvPr/>
+        </p:nvSpPr>
+        <p:spPr>
+          <a:xfrm>
+            <a:off x="8229600" y="3773350"/>
+            <a:ext cx="3182112" cy="828982"/>
           </a:xfrm>
           <a:prstGeom prst="rect">
             <a:avLst/>
@@ -15462,18 +13673,18 @@
       </p:sp>
       <p:sp>
         <p:nvSpPr>
-          <p:cNvPr id="13" name="verdict-2"/>
+          <p:cNvPr id="11" name="verdict-2"/>
           <p:cNvSpPr/>
           <p:nvPr/>
         </p:nvSpPr>
         <p:spPr>
           <a:xfrm>
-            <a:off x="8065008" y="4937760"/>
-            <a:ext cx="3575304" cy="1325880"/>
+            <a:off x="8001000" y="4849219"/>
+            <a:ext cx="3639312" cy="1423342"/>
           </a:xfrm>
           <a:prstGeom prst="roundRect">
             <a:avLst>
-              <a:gd name="adj" fmla="val 8276"/>
+              <a:gd name="adj" fmla="val 7709"/>
             </a:avLst>
           </a:prstGeom>
           <a:solidFill>
@@ -15484,13 +13695,13 @@
       </p:sp>
       <p:sp>
         <p:nvSpPr>
-          <p:cNvPr id="14" name="Text 10"/>
-          <p:cNvSpPr txBox="1"/>
-          <p:nvPr/>
-        </p:nvSpPr>
-        <p:spPr>
-          <a:xfrm>
-            <a:off x="8293608" y="5047488"/>
+          <p:cNvPr id="12" name="Text 9"/>
+          <p:cNvSpPr txBox="1"/>
+          <p:nvPr/>
+        </p:nvSpPr>
+        <p:spPr>
+          <a:xfrm>
+            <a:off x="8229600" y="4986379"/>
             <a:ext cx="1828800" cy="292608"/>
           </a:xfrm>
           <a:prstGeom prst="rect">
@@ -15507,7 +13718,7 @@
               <a:buNone/>
             </a:pPr>
             <a:r>
-              <a:rPr lang="ko-KR" sz="1400" b="1" dirty="0">
+              <a:rPr lang="ko-KR" sz="1500" b="1" dirty="0">
                 <a:solidFill>
                   <a:srgbClr val="FFFFFF"/>
                 </a:solidFill>
@@ -15517,20 +13728,20 @@
               </a:rPr>
               <a:t>판정</a:t>
             </a:r>
-            <a:endParaRPr lang="ko-KR" sz="1400" dirty="0"/>
-          </a:p>
-        </p:txBody>
-      </p:sp>
-      <p:sp>
-        <p:nvSpPr>
-          <p:cNvPr id="15" name="Text 11"/>
-          <p:cNvSpPr txBox="1"/>
-          <p:nvPr/>
-        </p:nvSpPr>
-        <p:spPr>
-          <a:xfrm>
-            <a:off x="8293608" y="5376672"/>
-            <a:ext cx="3118104" cy="822960"/>
+            <a:endParaRPr lang="ko-KR" sz="1500" dirty="0"/>
+          </a:p>
+        </p:txBody>
+      </p:sp>
+      <p:sp>
+        <p:nvSpPr>
+          <p:cNvPr id="13" name="Text 10"/>
+          <p:cNvSpPr txBox="1"/>
+          <p:nvPr/>
+        </p:nvSpPr>
+        <p:spPr>
+          <a:xfrm>
+            <a:off x="8229600" y="5352139"/>
+            <a:ext cx="3182112" cy="828982"/>
           </a:xfrm>
           <a:prstGeom prst="rect">
             <a:avLst/>

--- a/slides/4주차_14조_발표.pptx
+++ b/slides/4주차_14조_발표.pptx
@@ -5312,7 +5312,7 @@
                 <a:ea typeface="Malgun Gothic" pitchFamily="34" charset="-122"/>
                 <a:cs typeface="Malgun Gothic" pitchFamily="34" charset="-120"/>
               </a:rPr>
-              <a:t>202103116-stack.github.io/4-_14-_-D/slides/charts</a:t>
+              <a:t>202103116-stack.github.io/youth-space-seoul-analysis/slides/charts</a:t>
             </a:r>
             <a:endParaRPr lang="ko-KR" sz="1000" dirty="0"/>
           </a:p>
